--- a/plans/ppt/TW-SELFSELECT台股買賣自動化系統-W6-講稿版.pptx
+++ b/plans/ppt/TW-SELFSELECT台股買賣自動化系統-W6-講稿版.pptx
@@ -2966,7 +2966,7 @@
           </a:p>
           <a:p>
             <a:r>
-              <a:t>如果你是試用版，沒有 selfselect_trader.py 源碼，執行 deploy_crypted.sh；如果你有購買源碼，把 selfselect_trader.py 源碼複製到 WSL 的 tw-autotrader 目錄下，執行 deploy_user.sh。</a:t>
+              <a:t>如果你是試用版，沒有 selfselect_trader.py 源碼，執行 deploy_crypted.sh；如果你有購買源碼，把 selfselect_trader.py 源碼複製到 WSL 的 tw-selfselect 目錄下，執行 deploy_user.sh。</a:t>
             </a:r>
           </a:p>
           <a:p>
@@ -12482,23 +12482,23 @@
           <a:p>
             <a:r>
               <a:rPr lang="zh-TW" altLang="en-US" dirty="0"/>
-              <a:t>使用</a:t>
+              <a:t>使用 Python 與 DSH</a:t>
             </a:r>
             <a:r>
               <a:rPr lang="en-US" altLang="zh-TW" dirty="0"/>
-              <a:t>Python</a:t>
+              <a:t/>
             </a:r>
             <a:r>
               <a:rPr lang="zh-TW" altLang="en-US" dirty="0"/>
-              <a:t>與</a:t>
+              <a:t/>
             </a:r>
             <a:r>
               <a:rPr lang="en-US" altLang="zh-TW" dirty="0" err="1"/>
-              <a:t>Opencode</a:t>
+              <a:t/>
             </a:r>
             <a:r>
               <a:rPr lang="en-US" altLang="zh-TW" dirty="0"/>
-              <a:t> AI</a:t>
+              <a:t/>
             </a:r>
             <a:endParaRPr lang="en-US" dirty="0"/>
           </a:p>

--- a/plans/ppt/TW-SELFSELECT台股買賣自動化系統-W6-講稿版.pptx
+++ b/plans/ppt/TW-SELFSELECT台股買賣自動化系統-W6-講稿版.pptx
@@ -2966,18 +2966,13 @@
           </a:p>
           <a:p>
             <a:r>
-              <a:t>如果你是試用版，沒有 selfselect_trader.py 源碼，執行 deploy_crypted.sh；如果你有購買源碼，把 selfselect_trader.py 源碼複製到 WSL 的 tw-selfselect 目錄下，執行 deploy_user.sh。</a:t>
-            </a:r>
-          </a:p>
-          <a:p>
-            <a:r>
-              <a:t>---</a:t>
+              <a:t>在專案根目錄執行 ./deploy_source.sh：它會先跑 preflight 測試（紅燈就中止），接著在本機建 Docker image、透過 SSH 直傳到 VM 載入、重啟容器，最後比對 core/version.py 的版本指紋，不符就中止並印出容器日誌。舊版的 deploy_crypted.sh／deploy_user.sh 已經不需要了。</a:t>
             </a:r>
           </a:p>
           <a:p/>
           <a:p>
             <a:r>
-              <a:t>【講師提示】確認學員知道自己屬於哪一種，對應哪個指令。</a:t>
+              <a:t>【講師提示】強調「部署前測試、部署後驗指紋」兩道關卡，這是避免上錯版本的關鍵。</a:t>
             </a:r>
           </a:p>
         </p:txBody>
@@ -3874,17 +3869,12 @@
           </a:p>
           <a:p>
             <a:r>
-              <a:t>第四步，設定雲端主機：確認靜態 IP；如果主機停機中，要先開啟；執行驗證之後，才能上傳到 VM。</a:t>
-            </a:r>
-          </a:p>
-          <a:p>
-            <a:r>
-              <a:t>第五步，Deploy：執行 deploy_crypted.sh 上傳加密主程式，或 deploy_user.sh 上傳沒加密的主程式。注意：如果 VM 非開機時間，上傳完要手動關機——否則下一個開機時間不會自行開機，因為開機時間到了程式仍處於休眠狀態。</a:t>
-            </a:r>
-          </a:p>
-          <a:p>
-            <a:r>
-              <a:t>---</a:t>
+              <a:t>第四步，設定雲端主機：確認靜態 IP；如果主機停機中，要先開啟；執行驗證之後，才能部署到 VM。</a:t>
+            </a:r>
+          </a:p>
+          <a:p>
+            <a:r>
+              <a:t>第五步，部署：在專案根目錄執行 ./deploy_source.sh（人工執行）——它會先跑 preflight 測試、建 image、透過 SSH 直傳到 VM、載入後重啟容器，最後比對版本指紋。注意：如果 VM 非開機時間，部署完要手動關機，否則下一個開機時間不會自行開機。</a:t>
             </a:r>
           </a:p>
           <a:p/>
@@ -13703,137 +13693,32 @@
           <a:lstStyle/>
           <a:p>
             <a:r>
-              <a:rPr lang="zh-TW" altLang="en-US" dirty="0"/>
-              <a:t>如果你是試用</a:t>
-            </a:r>
-            <a:r>
-              <a:rPr lang="en-US" altLang="zh-TW" dirty="0"/>
-              <a:t>,</a:t>
-            </a:r>
-            <a:r>
-              <a:rPr lang="zh-TW" altLang="en-US" dirty="0"/>
-              <a:t>沒有</a:t>
-            </a:r>
-            <a:r>
-              <a:rPr lang="en-US" altLang="zh-TW" dirty="0"/>
-              <a:t>selfselect_trader.py</a:t>
-            </a:r>
-            <a:r>
-              <a:rPr lang="zh-TW" altLang="en-US" dirty="0"/>
-              <a:t>源碼</a:t>
-            </a:r>
-            <a:r>
-              <a:rPr lang="en-US" altLang="zh-TW" dirty="0"/>
-              <a:t>=&gt;./deploy_crypted.sh</a:t>
-            </a:r>
-            <a:br>
-              <a:rPr lang="en-US" altLang="zh-TW" dirty="0"/>
-            </a:br>
-            <a:r>
-              <a:rPr lang="zh-TW" altLang="en-US" dirty="0"/>
-              <a:t>如果你有購買</a:t>
-            </a:r>
-            <a:r>
-              <a:rPr lang="en-US" altLang="zh-TW" dirty="0"/>
-              <a:t>selfselect_trader.py</a:t>
-            </a:r>
-            <a:r>
-              <a:rPr lang="zh-TW" altLang="en-US" dirty="0"/>
-              <a:t>源碼</a:t>
-            </a:r>
-            <a:r>
-              <a:rPr lang="en-US" altLang="zh-TW" dirty="0"/>
-              <a:t>,</a:t>
-            </a:r>
-            <a:r>
-              <a:rPr lang="zh-TW" altLang="en-US" dirty="0"/>
-              <a:t>把</a:t>
-            </a:r>
-            <a:r>
-              <a:rPr lang="en-US" altLang="zh-TW" dirty="0"/>
-              <a:t>selfselect_trader.py</a:t>
-            </a:r>
-            <a:r>
-              <a:rPr lang="zh-TW" altLang="en-US" dirty="0"/>
-              <a:t>源碼複製到</a:t>
-            </a:r>
-            <a:r>
-              <a:rPr lang="en-US" altLang="zh-TW" dirty="0" err="1"/>
-              <a:t>wsl</a:t>
-            </a:r>
-            <a:r>
-              <a:rPr lang="en-US" altLang="zh-TW" dirty="0"/>
-              <a:t> </a:t>
-            </a:r>
-            <a:r>
-              <a:rPr lang="en-US" altLang="zh-TW" dirty="0" err="1"/>
-              <a:t>linux</a:t>
-            </a:r>
-            <a:r>
-              <a:rPr lang="zh-TW" altLang="en-US" dirty="0"/>
-              <a:t>的</a:t>
-            </a:r>
-            <a:br>
-              <a:rPr lang="en-US" altLang="zh-TW" dirty="0"/>
-            </a:br>
-            <a:r>
-              <a:rPr lang="en-US" altLang="zh-TW" dirty="0"/>
-              <a:t>~/</a:t>
-            </a:r>
-            <a:r>
-              <a:rPr lang="en-US" altLang="zh-TW" dirty="0" err="1"/>
-              <a:t>tw</a:t>
-            </a:r>
-            <a:r>
-              <a:rPr lang="en-US" altLang="zh-TW" dirty="0"/>
-              <a:t>-Autotrader/</a:t>
-            </a:r>
-            <a:r>
-              <a:rPr lang="zh-TW" altLang="en-US" dirty="0"/>
-              <a:t>下於</a:t>
-            </a:r>
-            <a:r>
-              <a:rPr lang="en-US" altLang="zh-TW" dirty="0" err="1"/>
-              <a:t>wsl</a:t>
-            </a:r>
-            <a:r>
-              <a:rPr lang="zh-TW" altLang="en-US" dirty="0"/>
-              <a:t>中執行</a:t>
-            </a:r>
-            <a:r>
-              <a:rPr lang="en-US" altLang="zh-TW" dirty="0"/>
-              <a:t>=&gt;./deploy_user.sh</a:t>
-            </a:r>
-            <a:br>
-              <a:rPr lang="en-US" altLang="zh-TW" dirty="0"/>
-            </a:br>
-            <a:endParaRPr lang="en-US" altLang="zh-TW" dirty="0"/>
-          </a:p>
-          <a:p>
-            <a:endParaRPr lang="zh-TW" altLang="en-US" dirty="0"/>
+              <a:t>在 WSL 的 ~/tw-selfselect/ 目錄執行：</a:t>
+            </a:r>
+          </a:p>
+          <a:p>
+            <a:r>
+              <a:t>./deploy_source.sh</a:t>
+            </a:r>
+          </a:p>
+          <a:p>
+            <a:r>
+              <a:t>（preflight 測試 → 建 image → SSH 直傳 → VM 載入 → 重啟容器 → 驗證指紋）</a:t>
+            </a:r>
+          </a:p>
+          <a:p>
+            <a:r>
+              <a:t>不再有加密版／源碼版兩種腳本——本專案一律源碼部署。</a:t>
+            </a:r>
           </a:p>
         </p:txBody>
       </p:sp>
-      <p:pic>
-        <p:nvPicPr>
-          <p:cNvPr id="7" name="圖片 6">
-            <a:extLst>
-              <a:ext uri="{FF2B5EF4-FFF2-40B4-BE49-F238E27FC236}">
-                <a16:creationId xmlns:a16="http://schemas.microsoft.com/office/drawing/2014/main" id="{FF81FE1C-22E2-E821-E15D-0C4922502D11}"/>
-              </a:ext>
-            </a:extLst>
-          </p:cNvPr>
-          <p:cNvPicPr>
-            <a:picLocks noChangeAspect="1"/>
-          </p:cNvPicPr>
+      <p:sp>
+        <p:nvSpPr>
+          <p:cNvPr id="5" name="TextBox 4"/>
+          <p:cNvSpPr txBox="1"/>
           <p:nvPr/>
-        </p:nvPicPr>
-        <p:blipFill>
-          <a:blip r:embed="rId2"/>
-          <a:stretch>
-            <a:fillRect/>
-          </a:stretch>
-        </p:blipFill>
+        </p:nvSpPr>
         <p:spPr>
           <a:xfrm>
             <a:off x="1446212" y="2286000"/>
@@ -13842,8 +13727,26 @@
           <a:prstGeom prst="rect">
             <a:avLst/>
           </a:prstGeom>
+          <a:noFill/>
         </p:spPr>
-      </p:pic>
+        <p:txBody>
+          <a:bodyPr wrap="square" anchor="ctr">
+            <a:spAutoFit/>
+          </a:bodyPr>
+          <a:lstStyle/>
+          <a:p>
+            <a:pPr algn="ctr"/>
+            <a:r>
+              <a:rPr sz="1400" i="1">
+                <a:solidFill>
+                  <a:srgbClr val="999999"/>
+                </a:solidFill>
+              </a:rPr>
+              <a:t>（./deploy_source.sh 實際輸出截圖待補）</a:t>
+            </a:r>
+          </a:p>
+        </p:txBody>
+      </p:sp>
     </p:spTree>
     <p:extLst>
       <p:ext uri="{BB962C8B-B14F-4D97-AF65-F5344CB8AC3E}">

--- a/plans/ppt/TW-SELFSELECT台股買賣自動化系統-W6-講稿版.pptx
+++ b/plans/ppt/TW-SELFSELECT台股買賣自動化系統-W6-講稿版.pptx
@@ -31,6 +31,7 @@
     <p:sldId id="267" r:id="rId22"/>
     <p:sldId id="293" r:id="rId23"/>
     <p:sldId id="292" r:id="rId24"/>
+    <p:sldId id="296" r:id="rId25"/>
     <p:sldId id="277" r:id="rId26"/>
   </p:sldIdLst>
   <p:sldSz cx="12188825" cy="6858000"/>
@@ -3543,6 +3544,98 @@
 </p:notes>
 </file>
 
+<file path=ppt/notesSlides/notesSlide20.xml><?xml version="1.0" encoding="utf-8"?>
+<p:notes xmlns:a="http://schemas.openxmlformats.org/drawingml/2006/main" xmlns:p="http://schemas.openxmlformats.org/presentationml/2006/main" xmlns:r="http://schemas.openxmlformats.org/officeDocument/2006/relationships">
+  <p:cSld>
+    <p:spTree>
+      <p:nvGrpSpPr>
+        <p:cNvPr id="1" name=""/>
+        <p:cNvGrpSpPr/>
+        <p:nvPr/>
+      </p:nvGrpSpPr>
+      <p:grpSpPr>
+        <a:xfrm>
+          <a:off x="0" y="0"/>
+          <a:ext cx="0" cy="0"/>
+          <a:chOff x="0" y="0"/>
+          <a:chExt cx="0" cy="0"/>
+        </a:xfrm>
+      </p:grpSpPr>
+      <p:sp>
+        <p:nvSpPr>
+          <p:cNvPr id="2" name="Slide Image Placeholder 1"/>
+          <p:cNvSpPr>
+            <a:spLocks noGrp="1"/>
+          </p:cNvSpPr>
+          <p:nvPr>
+            <p:ph type="sldImg" idx="2"/>
+          </p:nvPr>
+        </p:nvSpPr>
+        <p:spPr/>
+      </p:sp>
+      <p:sp>
+        <p:nvSpPr>
+          <p:cNvPr id="3" name="Notes Placeholder 2"/>
+          <p:cNvSpPr>
+            <a:spLocks noGrp="1"/>
+          </p:cNvSpPr>
+          <p:nvPr>
+            <p:ph type="body" idx="3" sz="quarter"/>
+          </p:nvPr>
+        </p:nvSpPr>
+        <p:spPr/>
+        <p:txBody>
+          <a:bodyPr/>
+          <a:lstStyle/>
+          <a:p>
+            <a:r>
+              <a:t>⏱ 建議時間：1 分鐘</a:t>
+            </a:r>
+          </a:p>
+          <a:p/>
+          <a:p>
+            <a:r>
+              <a:t>這一頁回答常見誤解：賣掉之後會不會馬上補一檔？不會。自選股是月頻換股，名單只在 D1 重算；賣出的空缺就留現金到下一次選股日。</a:t>
+            </a:r>
+          </a:p>
+          <a:p>
+            <a:r>
+              <a:t>兩個例外：第一，該檔如果還在名單裡，月中它的策略再出買訊可以重新進場；第二，immediate 的強制進場每檔只有第一次（logs/selfselect_filled.json），之後都靠策略訊號。</a:t>
+            </a:r>
+          </a:p>
+          <a:p>
+            <a:r>
+              <a:t>每日的「買入不足補足」只補已持有但不足的部位，空倉不會建倉，所以不會拿來補名額。</a:t>
+            </a:r>
+          </a:p>
+          <a:p/>
+          <a:p>
+            <a:r>
+              <a:t>【講師提示】強調「月頻換股＝不追高補位」是為了省交易成本；代價是資金會閒置一小段時間。</a:t>
+            </a:r>
+          </a:p>
+        </p:txBody>
+      </p:sp>
+      <p:sp>
+        <p:nvSpPr>
+          <p:cNvPr id="4" name="Slide Number Placeholder 3"/>
+          <p:cNvSpPr>
+            <a:spLocks noGrp="1"/>
+          </p:cNvSpPr>
+          <p:nvPr>
+            <p:ph type="sldNum" idx="5" sz="quarter"/>
+          </p:nvPr>
+        </p:nvSpPr>
+        <p:spPr/>
+      </p:sp>
+    </p:spTree>
+  </p:cSld>
+  <p:clrMapOvr>
+    <a:masterClrMapping/>
+  </p:clrMapOvr>
+</p:notes>
+</file>
+
 <file path=ppt/notesSlides/notesSlide21.xml><?xml version="1.0" encoding="utf-8"?>
 <p:notes xmlns:a="http://schemas.openxmlformats.org/drawingml/2006/main" xmlns:p="http://schemas.openxmlformats.org/presentationml/2006/main" xmlns:r="http://schemas.openxmlformats.org/officeDocument/2006/relationships">
   <p:cSld>
@@ -19263,6 +19356,145 @@
 </file>
 
 <file path=ppt/slides/slide20.xml><?xml version="1.0" encoding="utf-8"?>
+<p:sld xmlns:a="http://schemas.openxmlformats.org/drawingml/2006/main" xmlns:p="http://schemas.openxmlformats.org/presentationml/2006/main" xmlns:r="http://schemas.openxmlformats.org/officeDocument/2006/relationships">
+  <p:cSld>
+    <p:spTree>
+      <p:nvGrpSpPr>
+        <p:cNvPr id="1" name=""/>
+        <p:cNvGrpSpPr/>
+        <p:nvPr/>
+      </p:nvGrpSpPr>
+      <p:grpSpPr/>
+      <p:sp>
+        <p:nvSpPr>
+          <p:cNvPr id="2" name="標題 1">
+            <a:extLst>
+              <a:ext uri="{FF2B5EF4-FFF2-40B4-BE49-F238E27FC236}">
+                <a16:creationId xmlns:a16="http://schemas.microsoft.com/office/drawing/2014/main" id="{F6C522D6-3DE1-E298-F152-0AF2BC6176F2}"/>
+              </a:ext>
+            </a:extLst>
+          </p:cNvPr>
+          <p:cNvSpPr>
+            <a:spLocks noGrp="1"/>
+          </p:cNvSpPr>
+          <p:nvPr>
+            <p:ph type="title"/>
+          </p:nvPr>
+        </p:nvSpPr>
+        <p:spPr>
+          <a:xfrm>
+            <a:off x="1293812" y="609600"/>
+            <a:ext cx="9982200" cy="533400"/>
+          </a:xfrm>
+        </p:spPr>
+        <p:txBody>
+          <a:bodyPr/>
+          <a:lstStyle/>
+          <a:p>
+            <a:r>
+              <a:t>賣出後會立刻補選嗎？</a:t>
+            </a:r>
+          </a:p>
+        </p:txBody>
+      </p:sp>
+      <p:sp>
+        <p:nvSpPr>
+          <p:cNvPr id="3" name="投影片編號版面配置區 2">
+            <a:extLst>
+              <a:ext uri="{FF2B5EF4-FFF2-40B4-BE49-F238E27FC236}">
+                <a16:creationId xmlns:a16="http://schemas.microsoft.com/office/drawing/2014/main" id="{A1833BC1-6B9E-7FDB-7338-D8845D210C22}"/>
+              </a:ext>
+            </a:extLst>
+          </p:cNvPr>
+          <p:cNvSpPr>
+            <a:spLocks noGrp="1"/>
+          </p:cNvSpPr>
+          <p:nvPr>
+            <p:ph type="sldNum" sz="quarter" idx="12"/>
+          </p:nvPr>
+        </p:nvSpPr>
+        <p:spPr/>
+        <p:txBody>
+          <a:bodyPr/>
+          <a:lstStyle/>
+          <a:p>
+            <a:fld id="{AAEAE4A8-A6E5-453E-B946-FB774B73F48C}" type="slidenum">
+              <a:rPr lang="en-US" smtClean="0"/>
+              <a:pPr/>
+              <a:t>19</a:t>
+            </a:fld>
+            <a:endParaRPr lang="en-US" dirty="0"/>
+          </a:p>
+        </p:txBody>
+      </p:sp>
+      <p:sp>
+        <p:nvSpPr>
+          <p:cNvPr id="4" name="內容版面配置區 3">
+            <a:extLst>
+              <a:ext uri="{FF2B5EF4-FFF2-40B4-BE49-F238E27FC236}">
+                <a16:creationId xmlns:a16="http://schemas.microsoft.com/office/drawing/2014/main" id="{B78CCF70-D624-BC05-FD4B-CE09DCCBCC6E}"/>
+              </a:ext>
+            </a:extLst>
+          </p:cNvPr>
+          <p:cNvSpPr>
+            <a:spLocks noGrp="1"/>
+          </p:cNvSpPr>
+          <p:nvPr>
+            <p:ph idx="1"/>
+          </p:nvPr>
+        </p:nvSpPr>
+        <p:spPr>
+          <a:xfrm>
+            <a:off x="1311274" y="1295400"/>
+            <a:ext cx="10269538" cy="4953000"/>
+          </a:xfrm>
+        </p:spPr>
+        <p:txBody>
+          <a:bodyPr>
+            <a:normAutofit/>
+          </a:bodyPr>
+          <a:lstStyle/>
+          <a:p>
+            <a:r>
+              <a:t>不會——月頻換股，名單在下次 D1 才重算</a:t>
+            </a:r>
+          </a:p>
+          <a:p>
+            <a:r>
+              <a:t>• 任何原因賣到 0 股（策略賣訊／停利／孤兒清倉）→ 不會立即補選；資金留現金等下一個 D1</a:t>
+            </a:r>
+          </a:p>
+          <a:p>
+            <a:r>
+              <a:t>• 該檔還在 .env 名單內：月中仍監控，策略再出買訊可以重新進場</a:t>
+            </a:r>
+          </a:p>
+          <a:p>
+            <a:r>
+              <a:t>• immediate 的強制進場「每檔一生一次」（logs/selfselect_filled.json）；之後一律靠訊號</a:t>
+            </a:r>
+          </a:p>
+          <a:p>
+            <a:r>
+              <a:t>• 每日補足只補「已持有但不足」的部位，空倉不建倉 ⇒ 不會拿來補名額</a:t>
+            </a:r>
+          </a:p>
+          <a:p>
+            <a:r>
+              <a:t>• --exclude、孤兒清倉不改名單；keep_wait 人工管理不受限</a:t>
+            </a:r>
+          </a:p>
+        </p:txBody>
+      </p:sp>
+    </p:spTree>
+  </p:cSld>
+  <p:clrMapOvr>
+    <a:masterClrMapping/>
+  </p:clrMapOvr>
+</p:sld>
+</file>
+
+<file path=ppt/slides/slide21.xml><?xml version="1.0" encoding="utf-8"?>
 <p:sld xmlns:a="http://schemas.openxmlformats.org/drawingml/2006/main" xmlns:r="http://schemas.openxmlformats.org/officeDocument/2006/relationships" xmlns:p="http://schemas.openxmlformats.org/presentationml/2006/main">
   <p:cSld>
     <p:spTree>

--- a/plans/ppt/TW-SELFSELECT台股買賣自動化系統-W6-講稿版.pptx
+++ b/plans/ppt/TW-SELFSELECT台股買賣自動化系統-W6-講稿版.pptx
@@ -31,6 +31,8 @@
     <p:sldId id="267" r:id="rId22"/>
     <p:sldId id="293" r:id="rId23"/>
     <p:sldId id="292" r:id="rId24"/>
+    <p:sldId id="297" r:id="rId35"/>
+    <p:sldId id="298" r:id="rId36"/>
     <p:sldId id="296" r:id="rId25"/>
     <p:sldId id="277" r:id="rId26"/>
   </p:sldIdLst>
@@ -3733,6 +3735,200 @@
 </p:notes>
 </file>
 
+<file path=ppt/notesSlides/notesSlide22.xml><?xml version="1.0" encoding="utf-8"?>
+<p:notes xmlns:a="http://schemas.openxmlformats.org/drawingml/2006/main" xmlns:p="http://schemas.openxmlformats.org/presentationml/2006/main" xmlns:r="http://schemas.openxmlformats.org/officeDocument/2006/relationships">
+  <p:cSld>
+    <p:spTree>
+      <p:nvGrpSpPr>
+        <p:cNvPr id="1" name=""/>
+        <p:cNvGrpSpPr/>
+        <p:nvPr/>
+      </p:nvGrpSpPr>
+      <p:grpSpPr>
+        <a:xfrm>
+          <a:off x="0" y="0"/>
+          <a:ext cx="0" cy="0"/>
+          <a:chOff x="0" y="0"/>
+          <a:chExt cx="0" cy="0"/>
+        </a:xfrm>
+      </p:grpSpPr>
+      <p:sp>
+        <p:nvSpPr>
+          <p:cNvPr id="2" name="Slide Image Placeholder 1"/>
+          <p:cNvSpPr>
+            <a:spLocks noGrp="1"/>
+          </p:cNvSpPr>
+          <p:nvPr>
+            <p:ph type="sldImg" idx="2"/>
+          </p:nvPr>
+        </p:nvSpPr>
+        <p:spPr/>
+      </p:sp>
+      <p:sp>
+        <p:nvSpPr>
+          <p:cNvPr id="3" name="Notes Placeholder 2"/>
+          <p:cNvSpPr>
+            <a:spLocks noGrp="1"/>
+          </p:cNvSpPr>
+          <p:nvPr>
+            <p:ph type="body" idx="3" sz="quarter"/>
+          </p:nvPr>
+        </p:nvSpPr>
+        <p:spPr/>
+        <p:txBody>
+          <a:bodyPr/>
+          <a:lstStyle/>
+          <a:p>
+            <a:r>
+              <a:t>⏱ 建議時間：1 分 30 秒</a:t>
+            </a:r>
+          </a:p>
+          <a:p/>
+          <a:p>
+            <a:r>
+              <a:t>這頁把整個使用流程串起來：第一次怎麼跑、之後每個月怎麼自動跑。</a:t>
+            </a:r>
+          </a:p>
+          <a:p>
+            <a:r>
+              <a:t>第一，部署：本機執行 deploy_source.sh，它會先跑測試、建 image、SSH 直傳到 VM、載入後重啟容器並驗指紋。</a:t>
+            </a:r>
+          </a:p>
+          <a:p>
+            <a:r>
+              <a:t>第二，第一次選股要在 VM 的容器內跑，加 --no-sync（容器沒有 gcloud）與 --allow-stale-holdings（全新安裝沒有 holdings.json）；先看 diff 再加 --apply。</a:t>
+            </a:r>
+          </a:p>
+          <a:p>
+            <a:r>
+              <a:t>第三，買進：immediate 模式下一個交易日 13:25–13:30 買滿；signal 模式等策略買訊。</a:t>
+            </a:r>
+          </a:p>
+          <a:p>
+            <a:r>
+              <a:t>第四，每月自動：開啟 SELFSELECT_AUTO=1，D1 13:36 選股、D2 13:25 買新名單；D1 失敗會在 D2 早上自動補跑。</a:t>
+            </a:r>
+          </a:p>
+          <a:p>
+            <a:r>
+              <a:t>最後用 holdings.json、performance.csv、Telegram 與對帳腳本確認結果。</a:t>
+            </a:r>
+          </a:p>
+          <a:p/>
+          <a:p>
+            <a:r>
+              <a:t>【講師提示】這頁是全課程的「操作總覽」，建議學員截圖；第一次上線時照順序做一次。</a:t>
+            </a:r>
+          </a:p>
+        </p:txBody>
+      </p:sp>
+      <p:sp>
+        <p:nvSpPr>
+          <p:cNvPr id="4" name="Slide Number Placeholder 3"/>
+          <p:cNvSpPr>
+            <a:spLocks noGrp="1"/>
+          </p:cNvSpPr>
+          <p:nvPr>
+            <p:ph type="sldNum" idx="5" sz="quarter"/>
+          </p:nvPr>
+        </p:nvSpPr>
+        <p:spPr/>
+      </p:sp>
+    </p:spTree>
+  </p:cSld>
+  <p:clrMapOvr>
+    <a:masterClrMapping/>
+  </p:clrMapOvr>
+</p:notes>
+</file>
+
+<file path=ppt/notesSlides/notesSlide23.xml><?xml version="1.0" encoding="utf-8"?>
+<p:notes xmlns:a="http://schemas.openxmlformats.org/drawingml/2006/main" xmlns:p="http://schemas.openxmlformats.org/presentationml/2006/main" xmlns:r="http://schemas.openxmlformats.org/officeDocument/2006/relationships">
+  <p:cSld>
+    <p:spTree>
+      <p:nvGrpSpPr>
+        <p:cNvPr id="1" name=""/>
+        <p:cNvGrpSpPr/>
+        <p:nvPr/>
+      </p:nvGrpSpPr>
+      <p:grpSpPr>
+        <a:xfrm>
+          <a:off x="0" y="0"/>
+          <a:ext cx="0" cy="0"/>
+          <a:chOff x="0" y="0"/>
+          <a:chExt cx="0" cy="0"/>
+        </a:xfrm>
+      </p:grpSpPr>
+      <p:sp>
+        <p:nvSpPr>
+          <p:cNvPr id="2" name="Slide Image Placeholder 1"/>
+          <p:cNvSpPr>
+            <a:spLocks noGrp="1"/>
+          </p:cNvSpPr>
+          <p:nvPr>
+            <p:ph type="sldImg" idx="2"/>
+          </p:nvPr>
+        </p:nvSpPr>
+        <p:spPr/>
+      </p:sp>
+      <p:sp>
+        <p:nvSpPr>
+          <p:cNvPr id="3" name="Notes Placeholder 2"/>
+          <p:cNvSpPr>
+            <a:spLocks noGrp="1"/>
+          </p:cNvSpPr>
+          <p:nvPr>
+            <p:ph type="body" idx="3" sz="quarter"/>
+          </p:nvPr>
+        </p:nvSpPr>
+        <p:spPr/>
+        <p:txBody>
+          <a:bodyPr/>
+          <a:lstStyle/>
+          <a:p>
+            <a:r>
+              <a:t>⏱ 建議時間：1 分 30 秒</a:t>
+            </a:r>
+          </a:p>
+          <a:p/>
+          <a:p>
+            <a:r>
+              <a:t>這頁把單一持股從買到賣講完。買進後由策略管理進出：auto 會把成交當下的策略鎖住，持有期間不換。</a:t>
+            </a:r>
+          </a:p>
+          <a:p>
+            <a:r>
+              <a:t>賣出有三個來源：策略賣訊、孤兒清倉、人工。賣掉之後名額不會馬上補，資金留現金到下一個 D1；同一檔如果還在名單裡，月中策略再出買訊仍可重新進場。</a:t>
+            </a:r>
+          </a:p>
+          <a:p/>
+          <a:p>
+            <a:r>
+              <a:t>【講師提示】搭配前一頁「賣出後不補選」一起講，學員最常誤會的就是「賣掉會自動補一檔」。</a:t>
+            </a:r>
+          </a:p>
+        </p:txBody>
+      </p:sp>
+      <p:sp>
+        <p:nvSpPr>
+          <p:cNvPr id="4" name="Slide Number Placeholder 3"/>
+          <p:cNvSpPr>
+            <a:spLocks noGrp="1"/>
+          </p:cNvSpPr>
+          <p:nvPr>
+            <p:ph type="sldNum" idx="5" sz="quarter"/>
+          </p:nvPr>
+        </p:nvSpPr>
+        <p:spPr/>
+      </p:sp>
+    </p:spTree>
+  </p:cSld>
+  <p:clrMapOvr>
+    <a:masterClrMapping/>
+  </p:clrMapOvr>
+</p:notes>
+</file>
+
 <file path=ppt/notesSlides/notesSlide3.xml><?xml version="1.0" encoding="utf-8"?>
 <p:notes xmlns:a="http://schemas.openxmlformats.org/drawingml/2006/main" xmlns:r="http://schemas.openxmlformats.org/officeDocument/2006/relationships" xmlns:p="http://schemas.openxmlformats.org/presentationml/2006/main">
   <p:cSld>
@@ -19604,6 +19800,289 @@
         <p14:creationId xmlns:p14="http://schemas.microsoft.com/office/powerpoint/2010/main" val="3103683689"/>
       </p:ext>
     </p:extLst>
+  </p:cSld>
+  <p:clrMapOvr>
+    <a:masterClrMapping/>
+  </p:clrMapOvr>
+</p:sld>
+</file>
+
+<file path=ppt/slides/slide22.xml><?xml version="1.0" encoding="utf-8"?>
+<p:sld xmlns:a="http://schemas.openxmlformats.org/drawingml/2006/main" xmlns:p="http://schemas.openxmlformats.org/presentationml/2006/main" xmlns:r="http://schemas.openxmlformats.org/officeDocument/2006/relationships">
+  <p:cSld>
+    <p:spTree>
+      <p:nvGrpSpPr>
+        <p:cNvPr id="1" name=""/>
+        <p:cNvGrpSpPr/>
+        <p:nvPr/>
+      </p:nvGrpSpPr>
+      <p:grpSpPr/>
+      <p:sp>
+        <p:nvSpPr>
+          <p:cNvPr id="2" name="標題 1">
+            <a:extLst>
+              <a:ext uri="{FF2B5EF4-FFF2-40B4-BE49-F238E27FC236}">
+                <a16:creationId xmlns:a16="http://schemas.microsoft.com/office/drawing/2014/main" id="{F6C522D6-3DE1-E298-F152-0AF2BC6176F2}"/>
+              </a:ext>
+            </a:extLst>
+          </p:cNvPr>
+          <p:cNvSpPr>
+            <a:spLocks noGrp="1"/>
+          </p:cNvSpPr>
+          <p:nvPr>
+            <p:ph type="title"/>
+          </p:nvPr>
+        </p:nvSpPr>
+        <p:spPr>
+          <a:xfrm>
+            <a:off x="1293812" y="609600"/>
+            <a:ext cx="9982200" cy="533400"/>
+          </a:xfrm>
+        </p:spPr>
+        <p:txBody>
+          <a:bodyPr/>
+          <a:lstStyle/>
+          <a:p>
+            <a:r>
+              <a:t>從第一次執行到每月自動（完整流程）</a:t>
+            </a:r>
+          </a:p>
+        </p:txBody>
+      </p:sp>
+      <p:sp>
+        <p:nvSpPr>
+          <p:cNvPr id="3" name="投影片編號版面配置區 2">
+            <a:extLst>
+              <a:ext uri="{FF2B5EF4-FFF2-40B4-BE49-F238E27FC236}">
+                <a16:creationId xmlns:a16="http://schemas.microsoft.com/office/drawing/2014/main" id="{A1833BC1-6B9E-7FDB-7338-D8845D210C22}"/>
+              </a:ext>
+            </a:extLst>
+          </p:cNvPr>
+          <p:cNvSpPr>
+            <a:spLocks noGrp="1"/>
+          </p:cNvSpPr>
+          <p:nvPr>
+            <p:ph type="sldNum" sz="quarter" idx="12"/>
+          </p:nvPr>
+        </p:nvSpPr>
+        <p:spPr/>
+        <p:txBody>
+          <a:bodyPr/>
+          <a:lstStyle/>
+          <a:p>
+            <a:fld id="{AAEAE4A8-A6E5-453E-B946-FB774B73F48C}" type="slidenum">
+              <a:rPr lang="en-US" smtClean="0"/>
+              <a:pPr/>
+              <a:t>19</a:t>
+            </a:fld>
+            <a:endParaRPr lang="en-US" dirty="0"/>
+          </a:p>
+        </p:txBody>
+      </p:sp>
+      <p:sp>
+        <p:nvSpPr>
+          <p:cNvPr id="4" name="內容版面配置區 3">
+            <a:extLst>
+              <a:ext uri="{FF2B5EF4-FFF2-40B4-BE49-F238E27FC236}">
+                <a16:creationId xmlns:a16="http://schemas.microsoft.com/office/drawing/2014/main" id="{B78CCF70-D624-BC05-FD4B-CE09DCCBCC6E}"/>
+              </a:ext>
+            </a:extLst>
+          </p:cNvPr>
+          <p:cNvSpPr>
+            <a:spLocks noGrp="1"/>
+          </p:cNvSpPr>
+          <p:nvPr>
+            <p:ph idx="1"/>
+          </p:nvPr>
+        </p:nvSpPr>
+        <p:spPr>
+          <a:xfrm>
+            <a:off x="1311274" y="1295400"/>
+            <a:ext cx="10269538" cy="4953000"/>
+          </a:xfrm>
+        </p:spPr>
+        <p:txBody>
+          <a:bodyPr>
+            <a:normAutofit/>
+          </a:bodyPr>
+          <a:lstStyle/>
+          <a:p>
+            <a:r>
+              <a:t>① 部署：本機執行 ./deploy_source.sh（preflight 測試 → 建 image → SSH 直傳 → VM 載入 → 驗指紋）</a:t>
+            </a:r>
+          </a:p>
+          <a:p>
+            <a:r>
+              <a:t>② 第一次選股（VM 容器內）：monthly_selfselect_run.py --risk normal --top-n 5 --no-sync --allow-stale-holdings</a:t>
+            </a:r>
+          </a:p>
+          <a:p>
+            <a:r>
+              <a:t>     先看 dry-run 的 .env diff；確認後加 --apply（自動備份）</a:t>
+            </a:r>
+          </a:p>
+          <a:p>
+            <a:r>
+              <a:t>③ 第一筆買進：immediate ⇒ 下一個交易日 13:25–13:30 買滿；signal ⇒ 等策略買訊</a:t>
+            </a:r>
+          </a:p>
+          <a:p>
+            <a:r>
+              <a:t>④ 每月自動（SELFSELECT_AUTO=1）：D1 13:36 選股 → 改 .env（備份）→ D2 13:25–13:30 買新名單</a:t>
+            </a:r>
+          </a:p>
+          <a:p>
+            <a:r>
+              <a:t>⑤ 失敗補跑：D2 08:05–08:39 自動重跑（最多 SELFSELECT_MAX_ATTEMPTS 次）</a:t>
+            </a:r>
+          </a:p>
+          <a:p>
+            <a:r>
+              <a:t>⑥ 驗證：logs/holdings.json、performance.csv、Telegram；對帳用 reconcile_broker_books.py</a:t>
+            </a:r>
+          </a:p>
+        </p:txBody>
+      </p:sp>
+    </p:spTree>
+  </p:cSld>
+  <p:clrMapOvr>
+    <a:masterClrMapping/>
+  </p:clrMapOvr>
+</p:sld>
+</file>
+
+<file path=ppt/slides/slide23.xml><?xml version="1.0" encoding="utf-8"?>
+<p:sld xmlns:a="http://schemas.openxmlformats.org/drawingml/2006/main" xmlns:p="http://schemas.openxmlformats.org/presentationml/2006/main" xmlns:r="http://schemas.openxmlformats.org/officeDocument/2006/relationships">
+  <p:cSld>
+    <p:spTree>
+      <p:nvGrpSpPr>
+        <p:cNvPr id="1" name=""/>
+        <p:cNvGrpSpPr/>
+        <p:nvPr/>
+      </p:nvGrpSpPr>
+      <p:grpSpPr/>
+      <p:sp>
+        <p:nvSpPr>
+          <p:cNvPr id="2" name="標題 1">
+            <a:extLst>
+              <a:ext uri="{FF2B5EF4-FFF2-40B4-BE49-F238E27FC236}">
+                <a16:creationId xmlns:a16="http://schemas.microsoft.com/office/drawing/2014/main" id="{F6C522D6-3DE1-E298-F152-0AF2BC6176F2}"/>
+              </a:ext>
+            </a:extLst>
+          </p:cNvPr>
+          <p:cNvSpPr>
+            <a:spLocks noGrp="1"/>
+          </p:cNvSpPr>
+          <p:nvPr>
+            <p:ph type="title"/>
+          </p:nvPr>
+        </p:nvSpPr>
+        <p:spPr>
+          <a:xfrm>
+            <a:off x="1293812" y="609600"/>
+            <a:ext cx="9982200" cy="533400"/>
+          </a:xfrm>
+        </p:spPr>
+        <p:txBody>
+          <a:bodyPr/>
+          <a:lstStyle/>
+          <a:p>
+            <a:r>
+              <a:t>一檔股票的生命週期：買進 → 持有 → 賣出 → 汰換</a:t>
+            </a:r>
+          </a:p>
+        </p:txBody>
+      </p:sp>
+      <p:sp>
+        <p:nvSpPr>
+          <p:cNvPr id="3" name="投影片編號版面配置區 2">
+            <a:extLst>
+              <a:ext uri="{FF2B5EF4-FFF2-40B4-BE49-F238E27FC236}">
+                <a16:creationId xmlns:a16="http://schemas.microsoft.com/office/drawing/2014/main" id="{A1833BC1-6B9E-7FDB-7338-D8845D210C22}"/>
+              </a:ext>
+            </a:extLst>
+          </p:cNvPr>
+          <p:cNvSpPr>
+            <a:spLocks noGrp="1"/>
+          </p:cNvSpPr>
+          <p:nvPr>
+            <p:ph type="sldNum" sz="quarter" idx="12"/>
+          </p:nvPr>
+        </p:nvSpPr>
+        <p:spPr/>
+        <p:txBody>
+          <a:bodyPr/>
+          <a:lstStyle/>
+          <a:p>
+            <a:fld id="{AAEAE4A8-A6E5-453E-B946-FB774B73F48C}" type="slidenum">
+              <a:rPr lang="en-US" smtClean="0"/>
+              <a:pPr/>
+              <a:t>19</a:t>
+            </a:fld>
+            <a:endParaRPr lang="en-US" dirty="0"/>
+          </a:p>
+        </p:txBody>
+      </p:sp>
+      <p:sp>
+        <p:nvSpPr>
+          <p:cNvPr id="4" name="內容版面配置區 3">
+            <a:extLst>
+              <a:ext uri="{FF2B5EF4-FFF2-40B4-BE49-F238E27FC236}">
+                <a16:creationId xmlns:a16="http://schemas.microsoft.com/office/drawing/2014/main" id="{B78CCF70-D624-BC05-FD4B-CE09DCCBCC6E}"/>
+              </a:ext>
+            </a:extLst>
+          </p:cNvPr>
+          <p:cNvSpPr>
+            <a:spLocks noGrp="1"/>
+          </p:cNvSpPr>
+          <p:nvPr>
+            <p:ph idx="1"/>
+          </p:nvPr>
+        </p:nvSpPr>
+        <p:spPr>
+          <a:xfrm>
+            <a:off x="1311274" y="1295400"/>
+            <a:ext cx="10269538" cy="4953000"/>
+          </a:xfrm>
+        </p:spPr>
+        <p:txBody>
+          <a:bodyPr>
+            <a:normAutofit/>
+          </a:bodyPr>
+          <a:lstStyle/>
+          <a:p>
+            <a:r>
+              <a:t>• 買進：immediate（名單出現後第一個 13:25–13:30 窗口，每檔一次）或 signal（等策略買訊）</a:t>
+            </a:r>
+          </a:p>
+          <a:p>
+            <a:r>
+              <a:t>• 持有：依策略訊號；auto 在成交當下鎖定策略（logs/auto_resolved.json），持有期間不換</a:t>
+            </a:r>
+          </a:p>
+          <a:p>
+            <a:r>
+              <a:t>• 賣出：① 策略賣訊（含 keep_wait 停利） ② 孤兒清倉（不在 PC_ 名單） ③ 人工</a:t>
+            </a:r>
+          </a:p>
+          <a:p>
+            <a:r>
+              <a:t>• 賣到 0 股：auto 釋放鎖定；同檔仍在名單 ⇒ 月中可靠訊號再進場（immediate 不會再強制）</a:t>
+            </a:r>
+          </a:p>
+          <a:p>
+            <a:r>
+              <a:t>• 名額不即時補：資金留現金等下一個 D1；未再選中的條目在 D1 汰換刪除</a:t>
+            </a:r>
+          </a:p>
+          <a:p>
+            <a:r>
+              <a:t>• keep_wait：人工管理，選股程式不增不刪</a:t>
+            </a:r>
+          </a:p>
+        </p:txBody>
+      </p:sp>
+    </p:spTree>
   </p:cSld>
   <p:clrMapOvr>
     <a:masterClrMapping/>

--- a/plans/ppt/TW-SELFSELECT台股買賣自動化系統-W6-講稿版.pptx
+++ b/plans/ppt/TW-SELFSELECT台股買賣自動化系統-W6-講稿版.pptx
@@ -3796,7 +3796,7 @@
           </a:p>
           <a:p>
             <a:r>
-              <a:t>第二，第一次選股要在 VM 的容器內跑，加 --no-sync（容器沒有 gcloud）與 --allow-stale-holdings（全新安裝沒有 holdings.json）；先看 diff 再加 --apply。</a:t>
+              <a:t>第二，第一次選股沒有專用程式——就是每月手動那支 scripts/monthly_selfselect_run.py（它會呼叫 scripts/monthly_rebalance_picker.py 打分選股，再改 .env）。在 VM 容器內跑，加 --no-sync（沒有 gcloud）與 --allow-stale-holdings（全新安裝沒有 holdings.json）；先看 diff 再加 --apply。</a:t>
             </a:r>
           </a:p>
           <a:p>
@@ -19588,7 +19588,7 @@
           <a:lstStyle/>
           <a:p>
             <a:r>
-              <a:t>賣出後會立刻補選嗎？</a:t>
+              <a:t>從第一次執行到每月自動（完整流程）</a:t>
             </a:r>
           </a:p>
         </p:txBody>
@@ -19652,32 +19652,47 @@
           <a:lstStyle/>
           <a:p>
             <a:r>
-              <a:t>不會——月頻換股，名單在下次 D1 才重算</a:t>
-            </a:r>
-          </a:p>
-          <a:p>
-            <a:r>
-              <a:t>• 任何原因賣到 0 股（策略賣訊／停利／孤兒清倉）→ 不會立即補選；資金留現金等下一個 D1</a:t>
-            </a:r>
-          </a:p>
-          <a:p>
-            <a:r>
-              <a:t>• 該檔還在 .env 名單內：月中仍監控，策略再出買訊可以重新進場</a:t>
-            </a:r>
-          </a:p>
-          <a:p>
-            <a:r>
-              <a:t>• immediate 的強制進場「每檔一生一次」（logs/selfselect_filled.json）；之後一律靠訊號</a:t>
-            </a:r>
-          </a:p>
-          <a:p>
-            <a:r>
-              <a:t>• 每日補足只補「已持有但不足」的部位，空倉不建倉 ⇒ 不會拿來補名額</a:t>
-            </a:r>
-          </a:p>
-          <a:p>
-            <a:r>
-              <a:t>• --exclude、孤兒清倉不改名單；keep_wait 人工管理不受限</a:t>
+              <a:t>① 部署：本機執行 ./deploy_source.sh（preflight 測試 → 建 image → SSH 直傳 → VM 載入 → 驗指紋）</a:t>
+            </a:r>
+          </a:p>
+          <a:p>
+            <a:r>
+              <a:t>② 第一次選股（VM 容器內）——就是每月手動那支程式：</a:t>
+            </a:r>
+          </a:p>
+          <a:p>
+            <a:r>
+              <a:t>      docker exec tw_selfselect_bot python scripts/monthly_selfselect_run.py \</a:t>
+            </a:r>
+          </a:p>
+          <a:p>
+            <a:r>
+              <a:t>          --risk normal --top-n 5 --no-sync --allow-stale-holdings</a:t>
+            </a:r>
+          </a:p>
+          <a:p>
+            <a:r>
+              <a:t>      先看 dry-run 的 .env diff；確認後加 --apply（自動備份）</a:t>
+            </a:r>
+          </a:p>
+          <a:p>
+            <a:r>
+              <a:t>③ 第一筆買進：immediate ⇒ 下一個交易日 13:25–13:30 買滿；signal ⇒ 等策略買訊</a:t>
+            </a:r>
+          </a:p>
+          <a:p>
+            <a:r>
+              <a:t>④ 每月自動（SELFSELECT_AUTO=1）：D1 13:36 選股 → 改 .env（備份）→ D2 13:25–13:30 買新名單</a:t>
+            </a:r>
+          </a:p>
+          <a:p>
+            <a:r>
+              <a:t>⑤ 失敗補跑：D2 08:05–08:39 自動重跑（最多 SELFSELECT_MAX_ATTEMPTS 次）</a:t>
+            </a:r>
+          </a:p>
+          <a:p>
+            <a:r>
+              <a:t>⑥ 驗證：logs/holdings.json、performance.csv、Telegram；對帳用 reconcile_broker_books.py</a:t>
             </a:r>
           </a:p>
         </p:txBody>
@@ -19691,7 +19706,7 @@
 </file>
 
 <file path=ppt/slides/slide21.xml><?xml version="1.0" encoding="utf-8"?>
-<p:sld xmlns:a="http://schemas.openxmlformats.org/drawingml/2006/main" xmlns:r="http://schemas.openxmlformats.org/officeDocument/2006/relationships" xmlns:p="http://schemas.openxmlformats.org/presentationml/2006/main">
+<p:sld xmlns:a="http://schemas.openxmlformats.org/drawingml/2006/main" xmlns:p="http://schemas.openxmlformats.org/presentationml/2006/main" xmlns:r="http://schemas.openxmlformats.org/officeDocument/2006/relationships">
   <p:cSld>
     <p:spTree>
       <p:nvGrpSpPr>
@@ -19699,20 +19714,13 @@
         <p:cNvGrpSpPr/>
         <p:nvPr/>
       </p:nvGrpSpPr>
-      <p:grpSpPr>
-        <a:xfrm>
-          <a:off x="0" y="0"/>
-          <a:ext cx="0" cy="0"/>
-          <a:chOff x="0" y="0"/>
-          <a:chExt cx="0" cy="0"/>
-        </a:xfrm>
-      </p:grpSpPr>
-      <p:sp>
-        <p:nvSpPr>
-          <p:cNvPr id="2" name="Title 1">
+      <p:grpSpPr/>
+      <p:sp>
+        <p:nvSpPr>
+          <p:cNvPr id="2" name="標題 1">
             <a:extLst>
               <a:ext uri="{FF2B5EF4-FFF2-40B4-BE49-F238E27FC236}">
-                <a16:creationId xmlns:a16="http://schemas.microsoft.com/office/drawing/2014/main" id="{69FAE308-3076-43DB-B834-DA0B0AE19AF9}"/>
+                <a16:creationId xmlns:a16="http://schemas.microsoft.com/office/drawing/2014/main" id="{F6C522D6-3DE1-E298-F152-0AF2BC6176F2}"/>
               </a:ext>
             </a:extLst>
           </p:cNvPr>
@@ -19725,8 +19733,70 @@
         </p:nvSpPr>
         <p:spPr>
           <a:xfrm>
-            <a:off x="531812" y="495300"/>
-            <a:ext cx="4888708" cy="5867400"/>
+            <a:off x="1293812" y="609600"/>
+            <a:ext cx="9982200" cy="533400"/>
+          </a:xfrm>
+        </p:spPr>
+        <p:txBody>
+          <a:bodyPr/>
+          <a:lstStyle/>
+          <a:p>
+            <a:r>
+              <a:t>一檔股票的生命週期：買進 → 持有 → 賣出 → 汰換</a:t>
+            </a:r>
+          </a:p>
+        </p:txBody>
+      </p:sp>
+      <p:sp>
+        <p:nvSpPr>
+          <p:cNvPr id="3" name="投影片編號版面配置區 2">
+            <a:extLst>
+              <a:ext uri="{FF2B5EF4-FFF2-40B4-BE49-F238E27FC236}">
+                <a16:creationId xmlns:a16="http://schemas.microsoft.com/office/drawing/2014/main" id="{A1833BC1-6B9E-7FDB-7338-D8845D210C22}"/>
+              </a:ext>
+            </a:extLst>
+          </p:cNvPr>
+          <p:cNvSpPr>
+            <a:spLocks noGrp="1"/>
+          </p:cNvSpPr>
+          <p:nvPr>
+            <p:ph type="sldNum" sz="quarter" idx="12"/>
+          </p:nvPr>
+        </p:nvSpPr>
+        <p:spPr/>
+        <p:txBody>
+          <a:bodyPr/>
+          <a:lstStyle/>
+          <a:p>
+            <a:fld id="{AAEAE4A8-A6E5-453E-B946-FB774B73F48C}" type="slidenum">
+              <a:rPr lang="en-US" smtClean="0"/>
+              <a:pPr/>
+              <a:t>19</a:t>
+            </a:fld>
+            <a:endParaRPr lang="en-US" dirty="0"/>
+          </a:p>
+        </p:txBody>
+      </p:sp>
+      <p:sp>
+        <p:nvSpPr>
+          <p:cNvPr id="4" name="內容版面配置區 3">
+            <a:extLst>
+              <a:ext uri="{FF2B5EF4-FFF2-40B4-BE49-F238E27FC236}">
+                <a16:creationId xmlns:a16="http://schemas.microsoft.com/office/drawing/2014/main" id="{B78CCF70-D624-BC05-FD4B-CE09DCCBCC6E}"/>
+              </a:ext>
+            </a:extLst>
+          </p:cNvPr>
+          <p:cNvSpPr>
+            <a:spLocks noGrp="1"/>
+          </p:cNvSpPr>
+          <p:nvPr>
+            <p:ph idx="1"/>
+          </p:nvPr>
+        </p:nvSpPr>
+        <p:spPr>
+          <a:xfrm>
+            <a:off x="1311274" y="1295400"/>
+            <a:ext cx="10269538" cy="4953000"/>
           </a:xfrm>
         </p:spPr>
         <p:txBody>
@@ -19736,70 +19806,37 @@
           <a:lstStyle/>
           <a:p>
             <a:r>
-              <a:rPr lang="zh-TW" altLang="en-US" dirty="0"/>
-              <a:t>本課程結束</a:t>
-            </a:r>
-            <a:r>
-              <a:rPr lang="en-US" altLang="zh-TW"/>
-              <a:t>!</a:t>
-            </a:r>
-            <a:br>
-              <a:rPr lang="en-US"/>
-            </a:br>
-            <a:r>
-              <a:rPr lang="en-US" dirty="0"/>
-              <a:t>Thank you</a:t>
-            </a:r>
-            <a:r>
-              <a:rPr lang="zh-TW" altLang="en-US" dirty="0"/>
-              <a:t>！</a:t>
-            </a:r>
-            <a:endParaRPr lang="en-US" dirty="0"/>
+              <a:t>• 買進：immediate（名單出現後第一個 13:25–13:30 窗口，每檔一次）或 signal（等策略買訊）</a:t>
+            </a:r>
+          </a:p>
+          <a:p>
+            <a:r>
+              <a:t>• 持有：依策略訊號；auto 在成交當下鎖定策略（logs/auto_resolved.json），持有期間不換</a:t>
+            </a:r>
+          </a:p>
+          <a:p>
+            <a:r>
+              <a:t>• 賣出：① 策略賣訊（含 keep_wait 停利） ② 孤兒清倉（不在 PC_ 名單） ③ 人工</a:t>
+            </a:r>
+          </a:p>
+          <a:p>
+            <a:r>
+              <a:t>• 賣到 0 股：auto 釋放鎖定；同檔仍在名單 ⇒ 月中可靠訊號再進場（immediate 不會再強制）</a:t>
+            </a:r>
+          </a:p>
+          <a:p>
+            <a:r>
+              <a:t>• 名額不即時補：資金留現金等下一個 D1；未再選中的條目在 D1 汰換刪除</a:t>
+            </a:r>
+          </a:p>
+          <a:p>
+            <a:r>
+              <a:t>• keep_wait：人工管理，選股程式不增不刪</a:t>
+            </a:r>
           </a:p>
         </p:txBody>
       </p:sp>
-      <p:sp>
-        <p:nvSpPr>
-          <p:cNvPr id="3" name="Content Placeholder 2">
-            <a:extLst>
-              <a:ext uri="{FF2B5EF4-FFF2-40B4-BE49-F238E27FC236}">
-                <a16:creationId xmlns:a16="http://schemas.microsoft.com/office/drawing/2014/main" id="{BABC2CE0-8806-4B2A-A10A-32984D317434}"/>
-              </a:ext>
-            </a:extLst>
-          </p:cNvPr>
-          <p:cNvSpPr>
-            <a:spLocks noGrp="1"/>
-          </p:cNvSpPr>
-          <p:nvPr>
-            <p:ph type="body" sz="quarter" idx="14"/>
-          </p:nvPr>
-        </p:nvSpPr>
-        <p:spPr>
-          <a:xfrm>
-            <a:off x="6768305" y="2247900"/>
-            <a:ext cx="4443413" cy="2400300"/>
-          </a:xfrm>
-        </p:spPr>
-        <p:txBody>
-          <a:bodyPr anchor="ctr"/>
-          <a:lstStyle/>
-          <a:p>
-            <a:r>
-              <a:rPr lang="en-US" dirty="0"/>
-              <a:t>frank@dinchen.com.tw</a:t>
-            </a:r>
-          </a:p>
-          <a:p>
-            <a:endParaRPr lang="en-US" dirty="0"/>
-          </a:p>
-        </p:txBody>
-      </p:sp>
     </p:spTree>
-    <p:extLst>
-      <p:ext uri="{BB962C8B-B14F-4D97-AF65-F5344CB8AC3E}">
-        <p14:creationId xmlns:p14="http://schemas.microsoft.com/office/powerpoint/2010/main" val="3103683689"/>
-      </p:ext>
-    </p:extLst>
   </p:cSld>
   <p:clrMapOvr>
     <a:masterClrMapping/>
@@ -19844,7 +19881,7 @@
           <a:lstStyle/>
           <a:p>
             <a:r>
-              <a:t>從第一次執行到每月自動（完整流程）</a:t>
+              <a:t>賣出後會立刻補選嗎？</a:t>
             </a:r>
           </a:p>
         </p:txBody>
@@ -19908,37 +19945,32 @@
           <a:lstStyle/>
           <a:p>
             <a:r>
-              <a:t>① 部署：本機執行 ./deploy_source.sh（preflight 測試 → 建 image → SSH 直傳 → VM 載入 → 驗指紋）</a:t>
-            </a:r>
-          </a:p>
-          <a:p>
-            <a:r>
-              <a:t>② 第一次選股（VM 容器內）：monthly_selfselect_run.py --risk normal --top-n 5 --no-sync --allow-stale-holdings</a:t>
-            </a:r>
-          </a:p>
-          <a:p>
-            <a:r>
-              <a:t>     先看 dry-run 的 .env diff；確認後加 --apply（自動備份）</a:t>
-            </a:r>
-          </a:p>
-          <a:p>
-            <a:r>
-              <a:t>③ 第一筆買進：immediate ⇒ 下一個交易日 13:25–13:30 買滿；signal ⇒ 等策略買訊</a:t>
-            </a:r>
-          </a:p>
-          <a:p>
-            <a:r>
-              <a:t>④ 每月自動（SELFSELECT_AUTO=1）：D1 13:36 選股 → 改 .env（備份）→ D2 13:25–13:30 買新名單</a:t>
-            </a:r>
-          </a:p>
-          <a:p>
-            <a:r>
-              <a:t>⑤ 失敗補跑：D2 08:05–08:39 自動重跑（最多 SELFSELECT_MAX_ATTEMPTS 次）</a:t>
-            </a:r>
-          </a:p>
-          <a:p>
-            <a:r>
-              <a:t>⑥ 驗證：logs/holdings.json、performance.csv、Telegram；對帳用 reconcile_broker_books.py</a:t>
+              <a:t>不會——月頻換股，名單在下次 D1 才重算</a:t>
+            </a:r>
+          </a:p>
+          <a:p>
+            <a:r>
+              <a:t>• 任何原因賣到 0 股（策略賣訊／停利／孤兒清倉）→ 不會立即補選；資金留現金等下一個 D1</a:t>
+            </a:r>
+          </a:p>
+          <a:p>
+            <a:r>
+              <a:t>• 該檔還在 .env 名單內：月中仍監控，策略再出買訊可以重新進場</a:t>
+            </a:r>
+          </a:p>
+          <a:p>
+            <a:r>
+              <a:t>• immediate 的強制進場「每檔一生一次」（logs/selfselect_filled.json）；之後一律靠訊號</a:t>
+            </a:r>
+          </a:p>
+          <a:p>
+            <a:r>
+              <a:t>• 每日補足只補「已持有但不足」的部位，空倉不建倉 ⇒ 不會拿來補名額</a:t>
+            </a:r>
+          </a:p>
+          <a:p>
+            <a:r>
+              <a:t>• --exclude、孤兒清倉不改名單；keep_wait 人工管理不受限</a:t>
             </a:r>
           </a:p>
         </p:txBody>
@@ -19952,7 +19984,7 @@
 </file>
 
 <file path=ppt/slides/slide23.xml><?xml version="1.0" encoding="utf-8"?>
-<p:sld xmlns:a="http://schemas.openxmlformats.org/drawingml/2006/main" xmlns:p="http://schemas.openxmlformats.org/presentationml/2006/main" xmlns:r="http://schemas.openxmlformats.org/officeDocument/2006/relationships">
+<p:sld xmlns:a="http://schemas.openxmlformats.org/drawingml/2006/main" xmlns:r="http://schemas.openxmlformats.org/officeDocument/2006/relationships" xmlns:p="http://schemas.openxmlformats.org/presentationml/2006/main">
   <p:cSld>
     <p:spTree>
       <p:nvGrpSpPr>
@@ -19960,13 +19992,20 @@
         <p:cNvGrpSpPr/>
         <p:nvPr/>
       </p:nvGrpSpPr>
-      <p:grpSpPr/>
-      <p:sp>
-        <p:nvSpPr>
-          <p:cNvPr id="2" name="標題 1">
+      <p:grpSpPr>
+        <a:xfrm>
+          <a:off x="0" y="0"/>
+          <a:ext cx="0" cy="0"/>
+          <a:chOff x="0" y="0"/>
+          <a:chExt cx="0" cy="0"/>
+        </a:xfrm>
+      </p:grpSpPr>
+      <p:sp>
+        <p:nvSpPr>
+          <p:cNvPr id="2" name="Title 1">
             <a:extLst>
               <a:ext uri="{FF2B5EF4-FFF2-40B4-BE49-F238E27FC236}">
-                <a16:creationId xmlns:a16="http://schemas.microsoft.com/office/drawing/2014/main" id="{F6C522D6-3DE1-E298-F152-0AF2BC6176F2}"/>
+                <a16:creationId xmlns:a16="http://schemas.microsoft.com/office/drawing/2014/main" id="{69FAE308-3076-43DB-B834-DA0B0AE19AF9}"/>
               </a:ext>
             </a:extLst>
           </p:cNvPr>
@@ -19979,26 +20018,45 @@
         </p:nvSpPr>
         <p:spPr>
           <a:xfrm>
-            <a:off x="1293812" y="609600"/>
-            <a:ext cx="9982200" cy="533400"/>
+            <a:off x="531812" y="495300"/>
+            <a:ext cx="4888708" cy="5867400"/>
           </a:xfrm>
         </p:spPr>
         <p:txBody>
-          <a:bodyPr/>
+          <a:bodyPr>
+            <a:normAutofit/>
+          </a:bodyPr>
           <a:lstStyle/>
           <a:p>
             <a:r>
-              <a:t>一檔股票的生命週期：買進 → 持有 → 賣出 → 汰換</a:t>
-            </a:r>
+              <a:rPr lang="zh-TW" altLang="en-US" dirty="0"/>
+              <a:t>本課程結束</a:t>
+            </a:r>
+            <a:r>
+              <a:rPr lang="en-US" altLang="zh-TW"/>
+              <a:t>!</a:t>
+            </a:r>
+            <a:br>
+              <a:rPr lang="en-US"/>
+            </a:br>
+            <a:r>
+              <a:rPr lang="en-US" dirty="0"/>
+              <a:t>Thank you</a:t>
+            </a:r>
+            <a:r>
+              <a:rPr lang="zh-TW" altLang="en-US" dirty="0"/>
+              <a:t>！</a:t>
+            </a:r>
+            <a:endParaRPr lang="en-US" dirty="0"/>
           </a:p>
         </p:txBody>
       </p:sp>
       <p:sp>
         <p:nvSpPr>
-          <p:cNvPr id="3" name="投影片編號版面配置區 2">
+          <p:cNvPr id="3" name="Content Placeholder 2">
             <a:extLst>
               <a:ext uri="{FF2B5EF4-FFF2-40B4-BE49-F238E27FC236}">
-                <a16:creationId xmlns:a16="http://schemas.microsoft.com/office/drawing/2014/main" id="{A1833BC1-6B9E-7FDB-7338-D8845D210C22}"/>
+                <a16:creationId xmlns:a16="http://schemas.microsoft.com/office/drawing/2014/main" id="{BABC2CE0-8806-4B2A-A10A-32984D317434}"/>
               </a:ext>
             </a:extLst>
           </p:cNvPr>
@@ -20006,83 +20064,35 @@
             <a:spLocks noGrp="1"/>
           </p:cNvSpPr>
           <p:nvPr>
-            <p:ph type="sldNum" sz="quarter" idx="12"/>
-          </p:nvPr>
-        </p:nvSpPr>
-        <p:spPr/>
-        <p:txBody>
-          <a:bodyPr/>
-          <a:lstStyle/>
-          <a:p>
-            <a:fld id="{AAEAE4A8-A6E5-453E-B946-FB774B73F48C}" type="slidenum">
-              <a:rPr lang="en-US" smtClean="0"/>
-              <a:pPr/>
-              <a:t>19</a:t>
-            </a:fld>
-            <a:endParaRPr lang="en-US" dirty="0"/>
-          </a:p>
-        </p:txBody>
-      </p:sp>
-      <p:sp>
-        <p:nvSpPr>
-          <p:cNvPr id="4" name="內容版面配置區 3">
-            <a:extLst>
-              <a:ext uri="{FF2B5EF4-FFF2-40B4-BE49-F238E27FC236}">
-                <a16:creationId xmlns:a16="http://schemas.microsoft.com/office/drawing/2014/main" id="{B78CCF70-D624-BC05-FD4B-CE09DCCBCC6E}"/>
-              </a:ext>
-            </a:extLst>
-          </p:cNvPr>
-          <p:cNvSpPr>
-            <a:spLocks noGrp="1"/>
-          </p:cNvSpPr>
-          <p:nvPr>
-            <p:ph idx="1"/>
+            <p:ph type="body" sz="quarter" idx="14"/>
           </p:nvPr>
         </p:nvSpPr>
         <p:spPr>
           <a:xfrm>
-            <a:off x="1311274" y="1295400"/>
-            <a:ext cx="10269538" cy="4953000"/>
+            <a:off x="6768305" y="2247900"/>
+            <a:ext cx="4443413" cy="2400300"/>
           </a:xfrm>
         </p:spPr>
         <p:txBody>
-          <a:bodyPr>
-            <a:normAutofit/>
-          </a:bodyPr>
+          <a:bodyPr anchor="ctr"/>
           <a:lstStyle/>
           <a:p>
             <a:r>
-              <a:t>• 買進：immediate（名單出現後第一個 13:25–13:30 窗口，每檔一次）或 signal（等策略買訊）</a:t>
-            </a:r>
-          </a:p>
-          <a:p>
-            <a:r>
-              <a:t>• 持有：依策略訊號；auto 在成交當下鎖定策略（logs/auto_resolved.json），持有期間不換</a:t>
-            </a:r>
-          </a:p>
-          <a:p>
-            <a:r>
-              <a:t>• 賣出：① 策略賣訊（含 keep_wait 停利） ② 孤兒清倉（不在 PC_ 名單） ③ 人工</a:t>
-            </a:r>
-          </a:p>
-          <a:p>
-            <a:r>
-              <a:t>• 賣到 0 股：auto 釋放鎖定；同檔仍在名單 ⇒ 月中可靠訊號再進場（immediate 不會再強制）</a:t>
-            </a:r>
-          </a:p>
-          <a:p>
-            <a:r>
-              <a:t>• 名額不即時補：資金留現金等下一個 D1；未再選中的條目在 D1 汰換刪除</a:t>
-            </a:r>
-          </a:p>
-          <a:p>
-            <a:r>
-              <a:t>• keep_wait：人工管理，選股程式不增不刪</a:t>
-            </a:r>
+              <a:rPr lang="en-US" dirty="0"/>
+              <a:t>frank@dinchen.com.tw</a:t>
+            </a:r>
+          </a:p>
+          <a:p>
+            <a:endParaRPr lang="en-US" dirty="0"/>
           </a:p>
         </p:txBody>
       </p:sp>
     </p:spTree>
+    <p:extLst>
+      <p:ext uri="{BB962C8B-B14F-4D97-AF65-F5344CB8AC3E}">
+        <p14:creationId xmlns:p14="http://schemas.microsoft.com/office/powerpoint/2010/main" val="3103683689"/>
+      </p:ext>
+    </p:extLst>
   </p:cSld>
   <p:clrMapOvr>
     <a:masterClrMapping/>

--- a/plans/ppt/TW-SELFSELECT台股買賣自動化系統-W6-講稿版.pptx
+++ b/plans/ppt/TW-SELFSELECT台股買賣自動化系統-W6-講稿版.pptx
@@ -3786,38 +3786,43 @@
           <a:p/>
           <a:p>
             <a:r>
-              <a:t>這頁把整個使用流程串起來：第一次怎麼跑、之後每個月怎麼自動跑。</a:t>
-            </a:r>
-          </a:p>
-          <a:p>
-            <a:r>
-              <a:t>第一，部署：本機執行 deploy_source.sh，它會先跑測試、建 image、SSH 直傳到 VM、載入後重啟容器並驗指紋。</a:t>
-            </a:r>
-          </a:p>
-          <a:p>
-            <a:r>
-              <a:t>第二，第一次選股沒有專用程式——就是每月手動那支 scripts/monthly_selfselect_run.py（它會呼叫 scripts/monthly_rebalance_picker.py 打分選股，再改 .env）。在 VM 容器內跑，加 --no-sync（沒有 gcloud）與 --allow-stale-holdings（全新安裝沒有 holdings.json）；先看 diff 再加 --apply。</a:t>
-            </a:r>
-          </a:p>
-          <a:p>
-            <a:r>
-              <a:t>第三，買進：immediate 模式下一個交易日 13:25–13:30 買滿；signal 模式等策略買訊。</a:t>
-            </a:r>
-          </a:p>
-          <a:p>
-            <a:r>
-              <a:t>第四，每月自動：開啟 SELFSELECT_AUTO=1，D1 13:36 選股、D2 13:25 買新名單；D1 失敗會在 D2 早上自動補跑。</a:t>
-            </a:r>
-          </a:p>
-          <a:p>
-            <a:r>
-              <a:t>最後用 holdings.json、performance.csv、Telegram 與對帳腳本確認結果。</a:t>
+              <a:t>這頁是整個使用流程總覽：選股在本機跑、VM 只負責下單。</a:t>
+            </a:r>
+          </a:p>
+          <a:p>
+            <a:r>
+              <a:t>第一，部署一次：執行 deploy_source.sh，會先跑測試、建 image、SSH 直傳、載入後重啟容器並驗指紋。</a:t>
+            </a:r>
+          </a:p>
+          <a:p>
+            <a:r>
+              <a:t>第二，本機準備一次：gcloud auth login（alias VM_auth），再把 VM 的 cache 拉回本機（VM_sync_cache）。</a:t>
+            </a:r>
+          </a:p>
+          <a:p>
+            <a:r>
+              <a:t>第三，每次選股都在本機：VM_pick 先看 .env diff，確認後 VM_sync_env 寫入本機 .env 並推回 VM，容器一分鐘內熱重載；第一次還沒有任何持股，用 VM_pick_first。</a:t>
+            </a:r>
+          </a:p>
+          <a:p>
+            <a:r>
+              <a:t>第四，買進：immediate 模式下一個交易日 13:25–13:30 買滿；signal 模式等策略買訊。</a:t>
+            </a:r>
+          </a:p>
+          <a:p>
+            <a:r>
+              <a:t>第五，之後每月由 VM 上的排程自動跑（SELFSELECT_AUTO=1）。</a:t>
+            </a:r>
+          </a:p>
+          <a:p>
+            <a:r>
+              <a:t>最後用 VM_hold、performance.csv、Telegram 與對帳腳本確認。</a:t>
             </a:r>
           </a:p>
           <a:p/>
           <a:p>
             <a:r>
-              <a:t>【講師提示】這頁是全課程的「操作總覽」，建議學員截圖；第一次上線時照順序做一次。</a:t>
+              <a:t>【講師提示】強調「本機選股、VM 下單」的分工；alias 很短，讓學員不用背長指令。</a:t>
             </a:r>
           </a:p>
         </p:txBody>
@@ -19652,47 +19657,42 @@
           <a:lstStyle/>
           <a:p>
             <a:r>
-              <a:t>① 部署：本機執行 ./deploy_source.sh（preflight 測試 → 建 image → SSH 直傳 → VM 載入 → 驗指紋）</a:t>
-            </a:r>
-          </a:p>
-          <a:p>
-            <a:r>
-              <a:t>② 第一次選股（VM 容器內）——就是每月手動那支程式：</a:t>
-            </a:r>
-          </a:p>
-          <a:p>
-            <a:r>
-              <a:t>      docker exec tw_selfselect_bot python scripts/monthly_selfselect_run.py \</a:t>
-            </a:r>
-          </a:p>
-          <a:p>
-            <a:r>
-              <a:t>          --risk normal --top-n 5 --no-sync --allow-stale-holdings</a:t>
-            </a:r>
-          </a:p>
-          <a:p>
-            <a:r>
-              <a:t>      先看 dry-run 的 .env diff；確認後加 --apply（自動備份）</a:t>
-            </a:r>
-          </a:p>
-          <a:p>
-            <a:r>
-              <a:t>③ 第一筆買進：immediate ⇒ 下一個交易日 13:25–13:30 買滿；signal ⇒ 等策略買訊</a:t>
-            </a:r>
-          </a:p>
-          <a:p>
-            <a:r>
-              <a:t>④ 每月自動（SELFSELECT_AUTO=1）：D1 13:36 選股 → 改 .env（備份）→ D2 13:25–13:30 買新名單</a:t>
-            </a:r>
-          </a:p>
-          <a:p>
-            <a:r>
-              <a:t>⑤ 失敗補跑：D2 08:05–08:39 自動重跑（最多 SELFSELECT_MAX_ATTEMPTS 次）</a:t>
-            </a:r>
-          </a:p>
-          <a:p>
-            <a:r>
-              <a:t>⑥ 驗證：logs/holdings.json、performance.csv、Telegram；對帳用 reconcile_broker_books.py</a:t>
+              <a:t>① 部署（一次）：本機執行 ./deploy_source.sh（preflight → build → SSH 直傳 → VM 載入 → 驗指紋）</a:t>
+            </a:r>
+          </a:p>
+          <a:p>
+            <a:r>
+              <a:t>② 本機準備（一次）：VM_auth（gcloud 登入）→ VM_sync_cache（把 VM 的 cache 拉回本機）</a:t>
+            </a:r>
+          </a:p>
+          <a:p>
+            <a:r>
+              <a:t>③ 選股（本機，每次）：</a:t>
+            </a:r>
+          </a:p>
+          <a:p>
+            <a:r>
+              <a:t>      VM_pick      看 .env diff（dry-run；首次空倉用 VM_pick_first）</a:t>
+            </a:r>
+          </a:p>
+          <a:p>
+            <a:r>
+              <a:t>      VM_sync_env  寫入本機 .env ＋ 推回 VM（容器 1 分鐘內熱重載）</a:t>
+            </a:r>
+          </a:p>
+          <a:p>
+            <a:r>
+              <a:t>④ 第一筆買進：immediate ⇒ 下一個交易日 13:25–13:30 買滿；signal ⇒ 等策略買訊</a:t>
+            </a:r>
+          </a:p>
+          <a:p>
+            <a:r>
+              <a:t>⑤ 每月自動（SELFSELECT_AUTO=1）：D1 13:36 選股 → D2 13:25–13:30 買新名單（VM 上自動）</a:t>
+            </a:r>
+          </a:p>
+          <a:p>
+            <a:r>
+              <a:t>⑥ 驗證：VM_hold／performance.csv／Telegram；對帳 reconcile_broker_books.py</a:t>
             </a:r>
           </a:p>
         </p:txBody>

--- a/plans/ppt/TW-SELFSELECT台股買賣自動化系統-W6-講稿版.pptx
+++ b/plans/ppt/TW-SELFSELECT台股買賣自動化系統-W6-講稿版.pptx
@@ -2877,7 +2877,7 @@
           </a:p>
           <a:p>
             <a:r>
-              <a:t>這時會跳到 Chrome 選擇你的 Google 帳戶，出現 SDK 要存取你的帳戶，點擊允許。回到 WSL，會看到訊息：「You are now logged in as」，後面是你的帳號，目前專案是 tw-autotrader——代表認證成功。</a:t>
+              <a:t>這時會跳到 Chrome 選擇你的 Google 帳戶，出現 SDK 要存取你的帳戶，點擊允許。回到 WSL，會看到訊息：「You are now logged in as」，後面是你的帳號，目前專案是 tw-selfselect——代表認證成功。</a:t>
             </a:r>
           </a:p>
           <a:p>
@@ -13640,131 +13640,36 @@
             <a:endParaRPr lang="en-US" altLang="zh-TW" dirty="0"/>
           </a:p>
           <a:p>
-            <a:br>
-              <a:rPr lang="en-US" altLang="zh-TW" dirty="0"/>
-            </a:br>
-            <a:r>
-              <a:rPr lang="zh-TW" altLang="en-US" dirty="0"/>
-              <a:t>這時候會跳到</a:t>
-            </a:r>
-            <a:r>
-              <a:rPr lang="en-US" altLang="zh-TW" dirty="0"/>
-              <a:t>chrome</a:t>
-            </a:r>
-            <a:r>
-              <a:rPr lang="zh-TW" altLang="en-US" dirty="0"/>
-              <a:t>選擇你的</a:t>
-            </a:r>
-            <a:r>
-              <a:rPr lang="en-US" altLang="zh-TW" dirty="0"/>
-              <a:t>google</a:t>
-            </a:r>
-            <a:r>
-              <a:rPr lang="zh-TW" altLang="en-US" dirty="0"/>
-              <a:t>帳戶</a:t>
-            </a:r>
-            <a:br>
-              <a:rPr lang="en-US" altLang="zh-TW" dirty="0"/>
-            </a:br>
-            <a:r>
-              <a:rPr lang="zh-TW" altLang="en-US" dirty="0"/>
-              <a:t>然後出現</a:t>
-            </a:r>
-            <a:r>
-              <a:rPr lang="en-US" altLang="zh-TW" dirty="0"/>
-              <a:t>SDK</a:t>
-            </a:r>
-            <a:r>
-              <a:rPr lang="zh-TW" altLang="en-US" dirty="0"/>
-              <a:t>要存取你的帳戶</a:t>
-            </a:r>
-            <a:r>
-              <a:rPr lang="en-US" altLang="zh-TW" dirty="0"/>
-              <a:t>,</a:t>
-            </a:r>
-            <a:r>
-              <a:rPr lang="zh-TW" altLang="en-US" dirty="0"/>
-              <a:t>點擊允許</a:t>
-            </a:r>
-            <a:r>
-              <a:rPr lang="en-US" altLang="zh-TW" dirty="0"/>
-              <a:t>.</a:t>
-            </a:r>
-            <a:br>
-              <a:rPr lang="en-US" altLang="zh-TW" dirty="0"/>
-            </a:br>
-            <a:br>
-              <a:rPr lang="en-US" altLang="zh-TW" dirty="0"/>
-            </a:br>
-            <a:br>
-              <a:rPr lang="en-US" altLang="zh-TW" dirty="0"/>
-            </a:br>
-            <a:br>
-              <a:rPr lang="en-US" altLang="zh-TW" dirty="0"/>
-            </a:br>
-            <a:br>
-              <a:rPr lang="en-US" altLang="zh-TW" dirty="0"/>
-            </a:br>
-            <a:br>
-              <a:rPr lang="en-US" altLang="zh-TW" dirty="0"/>
-            </a:br>
-            <a:br>
-              <a:rPr lang="en-US" altLang="zh-TW" dirty="0"/>
-            </a:br>
-            <a:br>
-              <a:rPr lang="en-US" altLang="zh-TW" dirty="0"/>
-            </a:br>
-            <a:r>
-              <a:rPr lang="zh-TW" altLang="en-US" dirty="0"/>
-              <a:t>此時可以回到</a:t>
-            </a:r>
-            <a:r>
-              <a:rPr lang="en-US" altLang="zh-TW" dirty="0" err="1"/>
-              <a:t>wsl</a:t>
-            </a:r>
-            <a:r>
-              <a:rPr lang="en-US" altLang="zh-TW" dirty="0"/>
-              <a:t>:</a:t>
-            </a:r>
-            <a:r>
-              <a:rPr lang="zh-TW" altLang="en-US" dirty="0"/>
-              <a:t>會有以下訊息</a:t>
-            </a:r>
-            <a:r>
-              <a:rPr lang="en-US" altLang="zh-TW" dirty="0"/>
-              <a:t>=&gt;</a:t>
-            </a:r>
-            <a:br>
-              <a:rPr lang="en-US" altLang="zh-TW" dirty="0"/>
-            </a:br>
-            <a:br>
-              <a:rPr lang="en-US" altLang="zh-TW" dirty="0"/>
-            </a:br>
-            <a:br>
-              <a:rPr lang="en-US" altLang="zh-TW" dirty="0"/>
-            </a:br>
-            <a:r>
-              <a:rPr lang="en-US" altLang="zh-TW" dirty="0"/>
+            <a:br/>
+            <a:r>
+              <a:t>這時候會跳到chrome選擇你的google帳戶</a:t>
+            </a:r>
+            <a:br/>
+            <a:r>
+              <a:t>然後出現SDK要存取你的帳戶,點擊允許.</a:t>
+            </a:r>
+            <a:br/>
+            <a:br/>
+            <a:br/>
+            <a:br/>
+            <a:br/>
+            <a:br/>
+            <a:br/>
+            <a:br/>
+            <a:r>
+              <a:t>此時可以回到wsl:會有以下訊息=&gt;</a:t>
+            </a:r>
+            <a:br/>
+            <a:br/>
+            <a:br/>
+            <a:r>
               <a:t>“You are now logged in as [frank@dinchen.com.tw].</a:t>
             </a:r>
-            <a:br>
-              <a:rPr lang="en-US" altLang="zh-TW" dirty="0"/>
-            </a:br>
-            <a:r>
-              <a:rPr lang="en-US" altLang="zh-TW" dirty="0"/>
-              <a:t>Your current project is [</a:t>
-            </a:r>
-            <a:r>
-              <a:rPr lang="en-US" altLang="zh-TW" dirty="0" err="1"/>
-              <a:t>tw-autotrader</a:t>
-            </a:r>
-            <a:r>
-              <a:rPr lang="en-US" altLang="zh-TW" dirty="0"/>
-              <a:t>].  You can change this setting by running:”</a:t>
-            </a:r>
-            <a:br>
-              <a:rPr lang="en-US" altLang="zh-TW" dirty="0"/>
-            </a:br>
+            <a:br/>
+            <a:r>
+              <a:t>Your current project is [tw-selfselect].  You can change this setting by running:”</a:t>
+            </a:r>
+            <a:br/>
             <a:endParaRPr lang="en-US" altLang="zh-TW" dirty="0"/>
           </a:p>
           <a:p>

--- a/plans/ppt/TW-SELFSELECT台股買賣自動化系統-W6-講稿版.pptx
+++ b/plans/ppt/TW-SELFSELECT台股買賣自動化系統-W6-講稿版.pptx
@@ -13642,10 +13642,12 @@
           <a:p>
             <a:br/>
             <a:r>
+              <a:rPr/>
               <a:t>這時候會跳到chrome選擇你的google帳戶</a:t>
             </a:r>
             <a:br/>
             <a:r>
+              <a:rPr/>
               <a:t>然後出現SDK要存取你的帳戶,點擊允許.</a:t>
             </a:r>
             <a:br/>
@@ -13657,16 +13659,19 @@
             <a:br/>
             <a:br/>
             <a:r>
+              <a:rPr/>
               <a:t>此時可以回到wsl:會有以下訊息=&gt;</a:t>
             </a:r>
             <a:br/>
             <a:br/>
             <a:br/>
             <a:r>
+              <a:rPr/>
               <a:t>“You are now logged in as [frank@dinchen.com.tw].</a:t>
             </a:r>
             <a:br/>
             <a:r>
+              <a:rPr/>
               <a:t>Your current project is [tw-selfselect].  You can change this setting by running:”</a:t>
             </a:r>
             <a:br/>
@@ -13892,21 +13897,25 @@
           <a:lstStyle/>
           <a:p>
             <a:r>
+              <a:rPr/>
               <a:t>在 WSL 的 ~/tw-selfselect/ 目錄執行：</a:t>
             </a:r>
           </a:p>
           <a:p>
             <a:r>
+              <a:rPr/>
               <a:t>./deploy_source.sh</a:t>
             </a:r>
           </a:p>
           <a:p>
             <a:r>
+              <a:rPr/>
               <a:t>（preflight 測試 → 建 image → SSH 直傳 → VM 載入 → 重啟容器 → 驗證指紋）</a:t>
             </a:r>
           </a:p>
           <a:p>
             <a:r>
+              <a:rPr/>
               <a:t>不再有加密版／源碼版兩種腳本——本專案一律源碼部署。</a:t>
             </a:r>
           </a:p>
@@ -19498,6 +19507,7 @@
           <a:lstStyle/>
           <a:p>
             <a:r>
+              <a:rPr/>
               <a:t>從第一次執行到每月自動（完整流程）</a:t>
             </a:r>
           </a:p>
@@ -19562,41 +19572,49 @@
           <a:lstStyle/>
           <a:p>
             <a:r>
+              <a:rPr/>
               <a:t>① 部署（一次）：本機執行 ./deploy_source.sh（preflight → build → SSH 直傳 → VM 載入 → 驗指紋）</a:t>
             </a:r>
           </a:p>
           <a:p>
             <a:r>
+              <a:rPr/>
               <a:t>② 本機準備（一次）：VM_auth（gcloud 登入）→ VM_sync_cache（把 VM 的 cache 拉回本機）</a:t>
             </a:r>
           </a:p>
           <a:p>
             <a:r>
+              <a:rPr/>
               <a:t>③ 選股（本機，每次）：</a:t>
             </a:r>
           </a:p>
           <a:p>
             <a:r>
+              <a:rPr/>
               <a:t>      VM_pick      看 .env diff（dry-run；首次空倉用 VM_pick_first）</a:t>
             </a:r>
           </a:p>
           <a:p>
             <a:r>
+              <a:rPr/>
               <a:t>      VM_sync_env  寫入本機 .env ＋ 推回 VM（容器 1 分鐘內熱重載）</a:t>
             </a:r>
           </a:p>
           <a:p>
             <a:r>
+              <a:rPr/>
               <a:t>④ 第一筆買進：immediate ⇒ 下一個交易日 13:25–13:30 買滿；signal ⇒ 等策略買訊</a:t>
             </a:r>
           </a:p>
           <a:p>
             <a:r>
+              <a:rPr/>
               <a:t>⑤ 每月自動（SELFSELECT_AUTO=1）：D1 13:36 選股 → D2 13:25–13:30 買新名單（VM 上自動）</a:t>
             </a:r>
           </a:p>
           <a:p>
             <a:r>
+              <a:rPr/>
               <a:t>⑥ 驗證：VM_hold／performance.csv／Telegram；對帳 reconcile_broker_books.py</a:t>
             </a:r>
           </a:p>
@@ -19647,6 +19665,7 @@
           <a:lstStyle/>
           <a:p>
             <a:r>
+              <a:rPr/>
               <a:t>一檔股票的生命週期：買進 → 持有 → 賣出 → 汰換</a:t>
             </a:r>
           </a:p>
@@ -19711,31 +19730,37 @@
           <a:lstStyle/>
           <a:p>
             <a:r>
+              <a:rPr/>
               <a:t>• 買進：immediate（名單出現後第一個 13:25–13:30 窗口，每檔一次）或 signal（等策略買訊）</a:t>
             </a:r>
           </a:p>
           <a:p>
             <a:r>
+              <a:rPr/>
               <a:t>• 持有：依策略訊號；auto 在成交當下鎖定策略（logs/auto_resolved.json），持有期間不換</a:t>
             </a:r>
           </a:p>
           <a:p>
             <a:r>
+              <a:rPr/>
               <a:t>• 賣出：① 策略賣訊（含 keep_wait 停利） ② 孤兒清倉（不在 PC_ 名單） ③ 人工</a:t>
             </a:r>
           </a:p>
           <a:p>
             <a:r>
+              <a:rPr/>
               <a:t>• 賣到 0 股：auto 釋放鎖定；同檔仍在名單 ⇒ 月中可靠訊號再進場（immediate 不會再強制）</a:t>
             </a:r>
           </a:p>
           <a:p>
             <a:r>
+              <a:rPr/>
               <a:t>• 名額不即時補：資金留現金等下一個 D1；未再選中的條目在 D1 汰換刪除</a:t>
             </a:r>
           </a:p>
           <a:p>
             <a:r>
+              <a:rPr/>
               <a:t>• keep_wait：人工管理，選股程式不增不刪</a:t>
             </a:r>
           </a:p>
@@ -19786,6 +19811,7 @@
           <a:lstStyle/>
           <a:p>
             <a:r>
+              <a:rPr/>
               <a:t>賣出後會立刻補選嗎？</a:t>
             </a:r>
           </a:p>
@@ -19850,31 +19876,37 @@
           <a:lstStyle/>
           <a:p>
             <a:r>
+              <a:rPr/>
               <a:t>不會——月頻換股，名單在下次 D1 才重算</a:t>
             </a:r>
           </a:p>
           <a:p>
             <a:r>
+              <a:rPr/>
               <a:t>• 任何原因賣到 0 股（策略賣訊／停利／孤兒清倉）→ 不會立即補選；資金留現金等下一個 D1</a:t>
             </a:r>
           </a:p>
           <a:p>
             <a:r>
+              <a:rPr/>
               <a:t>• 該檔還在 .env 名單內：月中仍監控，策略再出買訊可以重新進場</a:t>
             </a:r>
           </a:p>
           <a:p>
             <a:r>
+              <a:rPr/>
               <a:t>• immediate 的強制進場「每檔一生一次」（logs/selfselect_filled.json）；之後一律靠訊號</a:t>
             </a:r>
           </a:p>
           <a:p>
             <a:r>
+              <a:rPr/>
               <a:t>• 每日補足只補「已持有但不足」的部位，空倉不建倉 ⇒ 不會拿來補名額</a:t>
             </a:r>
           </a:p>
           <a:p>
             <a:r>
+              <a:rPr/>
               <a:t>• --exclude、孤兒清倉不改名單；keep_wait 人工管理不受限</a:t>
             </a:r>
           </a:p>

--- a/plans/ppt/TW-SELFSELECT台股買賣自動化系統-W6-講稿版.pptx
+++ b/plans/ppt/TW-SELFSELECT台股買賣自動化系統-W6-講稿版.pptx
@@ -2969,7 +2969,7 @@
           </a:p>
           <a:p>
             <a:r>
-              <a:t>在專案根目錄執行 ./deploy_source.sh：它會先跑 preflight 測試（紅燈就中止），接著在本機建 Docker image、透過 SSH 直傳到 VM 載入、重啟容器，最後比對 core/version.py 的版本指紋，不符就中止並印出容器日誌。舊版的 deploy_crypted.sh／deploy_user.sh 已經不需要了。</a:t>
+              <a:t>在專案根目錄執行 ./deploy_source.sh：它會先跑 preflight 測試（紅燈就中止），接著在本機建 Docker image、透過 SSH 直傳到 VM 載入、重啟容器，最後比對 core/version.py 的版本指紋，不符就中止並印出容器日誌。本專案原始碼全部公開，直接源碼部署（沒有加密版／源碼版之分）。</a:t>
             </a:r>
           </a:p>
           <a:p/>
@@ -3245,7 +3245,7 @@
           </a:p>
           <a:p>
             <a:r>
-              <a:t>有源碼的同學，可以把源碼第十到十一行的 SYS_TELEGRAM_BOT 和 SYS_TELEGRAM_CHAT_ID 的值改掉，改成你自己的 Telegram bot 與 chat ID。另外，休眠前程式會發送持倉報告。</a:t>
+              <a:t>原始碼都在 GitHub：把第十到十一行的 SYS_TELEGRAM_BOT 和 SYS_TELEGRAM_CHAT_ID 的值改掉，改成你自己的 Telegram bot 與 chat ID。另外，休眠前程式會發送持倉報告。</a:t>
             </a:r>
           </a:p>
           <a:p>
@@ -14437,117 +14437,117 @@
           <a:p>
             <a:r>
               <a:rPr lang="en-US" altLang="zh-TW" dirty="0"/>
-              <a:t>VM</a:t>
+              <a:t>原始碼公開：把第 10~11 行 SYS_TELEGRAM_BOT／SYS_TELEGRAM_CHAT_ID 的值改成你自己的即可</a:t>
             </a:r>
             <a:r>
               <a:rPr lang="zh-TW" altLang="en-US" dirty="0"/>
-              <a:t>開機</a:t>
+              <a:t/>
             </a:r>
             <a:r>
               <a:rPr lang="en-US" altLang="zh-TW" dirty="0"/>
-              <a:t>=&gt;</a:t>
+              <a:t/>
             </a:r>
             <a:r>
               <a:rPr lang="zh-TW" altLang="en-US" dirty="0"/>
-              <a:t>檢查一下版本跟</a:t>
+              <a:t/>
             </a:r>
             <a:r>
               <a:rPr lang="en-US" altLang="zh-TW" dirty="0"/>
-              <a:t>Build</a:t>
+              <a:t/>
             </a:r>
             <a:r>
               <a:rPr lang="zh-TW" altLang="en-US" dirty="0"/>
-              <a:t>日期是否是你</a:t>
+              <a:t/>
             </a:r>
             <a:r>
               <a:rPr lang="en-US" altLang="zh-TW" dirty="0"/>
-              <a:t>deploy</a:t>
+              <a:t/>
             </a:r>
             <a:r>
               <a:rPr lang="zh-TW" altLang="en-US" dirty="0"/>
-              <a:t>版本</a:t>
+              <a:t/>
             </a:r>
             <a:r>
               <a:rPr lang="en-US" altLang="zh-TW" dirty="0"/>
-              <a:t>!</a:t>
+              <a:t/>
             </a:r>
             <a:br>
               <a:rPr lang="en-US" altLang="zh-TW" dirty="0"/>
             </a:br>
             <a:r>
               <a:rPr lang="zh-TW" altLang="en-US" dirty="0"/>
-              <a:t>程式會向我的</a:t>
+              <a:t/>
             </a:r>
             <a:r>
               <a:rPr lang="en-US" altLang="zh-TW" dirty="0"/>
-              <a:t>TG</a:t>
+              <a:t/>
             </a:r>
             <a:r>
               <a:rPr lang="zh-TW" altLang="en-US" dirty="0"/>
-              <a:t>發送</a:t>
+              <a:t/>
             </a:r>
             <a:r>
               <a:rPr lang="en-US" altLang="zh-TW" dirty="0" err="1"/>
-              <a:t>xxxx</a:t>
+              <a:t/>
             </a:r>
             <a:r>
               <a:rPr lang="en-US" altLang="zh-TW" dirty="0"/>
-              <a:t>(</a:t>
+              <a:t/>
             </a:r>
             <a:r>
               <a:rPr lang="zh-TW" altLang="en-US" dirty="0"/>
-              <a:t>你的</a:t>
+              <a:t/>
             </a:r>
             <a:r>
               <a:rPr lang="en-US" altLang="zh-TW" dirty="0"/>
-              <a:t>TG</a:t>
+              <a:t/>
             </a:r>
             <a:r>
               <a:rPr lang="zh-TW" altLang="en-US" dirty="0"/>
-              <a:t> </a:t>
+              <a:t/>
             </a:r>
             <a:r>
               <a:rPr lang="en-US" altLang="zh-TW" dirty="0"/>
-              <a:t>id)is running!</a:t>
+              <a:t/>
             </a:r>
             <a:br>
               <a:rPr lang="en-US" altLang="zh-TW" dirty="0"/>
             </a:br>
             <a:r>
               <a:rPr lang="zh-TW" altLang="en-US" dirty="0"/>
-              <a:t>有源碼的可以把源碼第</a:t>
+              <a:t/>
             </a:r>
             <a:r>
               <a:rPr lang="en-US" altLang="zh-TW" dirty="0"/>
-              <a:t>10~11</a:t>
+              <a:t/>
             </a:r>
             <a:r>
               <a:rPr lang="zh-TW" altLang="en-US" dirty="0"/>
-              <a:t>行</a:t>
+              <a:t/>
             </a:r>
             <a:r>
               <a:rPr lang="en-US" altLang="zh-TW" dirty="0"/>
-              <a:t>:</a:t>
+              <a:t/>
             </a:r>
             <a:r>
               <a:rPr lang="zh-TW" altLang="en-US" dirty="0"/>
-              <a:t> </a:t>
+              <a:t/>
             </a:r>
             <a:r>
               <a:rPr lang="zh-TW" altLang="zh-TW" sz="1600" b="0" dirty="0"/>
-              <a:t>SYS_TELEGRAM_BOT</a:t>
+              <a:t/>
             </a:r>
             <a:r>
               <a:rPr lang="zh-TW" altLang="en-US" sz="1600" b="0" dirty="0"/>
-              <a:t>跟</a:t>
+              <a:t/>
             </a:r>
             <a:r>
               <a:rPr lang="zh-TW" altLang="zh-TW" sz="1600" b="0" dirty="0"/>
-              <a:t>SYS_TELEGRAM_CHAT_ID</a:t>
+              <a:t/>
             </a:r>
             <a:r>
               <a:rPr lang="zh-TW" altLang="en-US" sz="1600" dirty="0"/>
-              <a:t>的值改掉即可 </a:t>
+              <a:t/>
             </a:r>
             <a:br>
               <a:rPr lang="en-US" altLang="zh-TW" dirty="0"/>
@@ -19242,189 +19242,22 @@
                     <a:bodyPr/>
                     <a:lstStyle/>
                     <a:p>
-                      <a:pPr algn="just">
-                        <a:buNone/>
-                      </a:pPr>
                       <a:r>
-                        <a:rPr lang="en-US" altLang="zh-TW" sz="1700" b="0" cap="none" spc="0" dirty="0">
-                          <a:solidFill>
-                            <a:schemeClr val="tx1"/>
-                          </a:solidFill>
-                          <a:highlight>
-                            <a:srgbClr val="FFFF00"/>
-                          </a:highlight>
-                        </a:rPr>
+                        <a:rPr sz="1200"/>
                         <a:t>Deploy:</a:t>
                       </a:r>
                     </a:p>
                     <a:p>
-                      <a:pPr marL="742950" lvl="1" indent="-285750" algn="just">
-                        <a:buFont typeface="Wingdings" panose="05000000000000000000" pitchFamily="2" charset="2"/>
-                        <a:buChar char="ü"/>
-                      </a:pPr>
                       <a:r>
-                        <a:rPr lang="zh-TW" altLang="en-US" sz="1700" b="0" cap="none" spc="0" dirty="0">
-                          <a:solidFill>
-                            <a:schemeClr val="tx1"/>
-                          </a:solidFill>
-                        </a:rPr>
-                        <a:t>執行</a:t>
-                      </a:r>
-                      <a:r>
-                        <a:rPr lang="en-US" altLang="zh-TW" sz="1700" b="1" cap="none" spc="0" dirty="0">
-                          <a:solidFill>
-                            <a:schemeClr val="tx1"/>
-                          </a:solidFill>
-                        </a:rPr>
-                        <a:t>./deploy_crypted.sh</a:t>
-                      </a:r>
-                      <a:r>
-                        <a:rPr lang="en-US" altLang="zh-TW" sz="1700" b="0" cap="none" spc="0" dirty="0">
-                          <a:solidFill>
-                            <a:schemeClr val="tx1"/>
-                          </a:solidFill>
-                        </a:rPr>
-                        <a:t>(</a:t>
-                      </a:r>
-                      <a:r>
-                        <a:rPr lang="zh-TW" altLang="en-US" sz="1700" b="0" cap="none" spc="0" dirty="0">
-                          <a:solidFill>
-                            <a:schemeClr val="tx1"/>
-                          </a:solidFill>
-                        </a:rPr>
-                        <a:t>上傳加密主程式</a:t>
-                      </a:r>
-                      <a:r>
-                        <a:rPr lang="en-US" altLang="zh-TW" sz="1700" b="0" cap="none" spc="0" dirty="0">
-                          <a:solidFill>
-                            <a:schemeClr val="tx1"/>
-                          </a:solidFill>
-                        </a:rPr>
-                        <a:t>)</a:t>
-                      </a:r>
-                      <a:r>
-                        <a:rPr lang="zh-TW" altLang="en-US" sz="1700" b="0" cap="none" spc="0" dirty="0">
-                          <a:solidFill>
-                            <a:schemeClr val="tx1"/>
-                          </a:solidFill>
-                        </a:rPr>
-                        <a:t> 或 </a:t>
-                      </a:r>
-                      <a:r>
-                        <a:rPr lang="en-US" altLang="zh-TW" sz="1700" b="1" cap="none" spc="0" dirty="0">
-                          <a:solidFill>
-                            <a:schemeClr val="tx1"/>
-                          </a:solidFill>
-                        </a:rPr>
-                        <a:t>./deploy_user.sh</a:t>
-                      </a:r>
-                      <a:r>
-                        <a:rPr lang="en-US" altLang="zh-TW" sz="1700" b="0" cap="none" spc="0" dirty="0">
-                          <a:solidFill>
-                            <a:schemeClr val="tx1"/>
-                          </a:solidFill>
-                        </a:rPr>
-                        <a:t>(</a:t>
-                      </a:r>
-                      <a:r>
-                        <a:rPr lang="zh-TW" altLang="en-US" sz="1700" b="0" cap="none" spc="0" dirty="0">
-                          <a:solidFill>
-                            <a:schemeClr val="tx1"/>
-                          </a:solidFill>
-                        </a:rPr>
-                        <a:t>上傳沒加密主程式</a:t>
-                      </a:r>
-                      <a:r>
-                        <a:rPr lang="en-US" altLang="zh-TW" sz="1700" b="0" cap="none" spc="0" dirty="0">
-                          <a:solidFill>
-                            <a:schemeClr val="tx1"/>
-                          </a:solidFill>
-                        </a:rPr>
-                        <a:t>)</a:t>
+                        <a:rPr sz="1200"/>
+                        <a:t>執行 ./deploy_source.sh（含 preflight 測試 → build → SSH 直傳 → 驗指紋）</a:t>
                       </a:r>
                     </a:p>
                     <a:p>
-                      <a:pPr marL="742950" lvl="1" indent="-285750" algn="just">
-                        <a:buFont typeface="Wingdings" panose="05000000000000000000" pitchFamily="2" charset="2"/>
-                        <a:buChar char="ü"/>
-                      </a:pPr>
                       <a:r>
-                        <a:rPr lang="en-US" altLang="zh-TW" sz="1700" b="0" cap="none" spc="0" dirty="0">
-                          <a:solidFill>
-                            <a:schemeClr val="tx1"/>
-                          </a:solidFill>
-                        </a:rPr>
-                        <a:t>VM</a:t>
+                        <a:rPr sz="1200"/>
+                        <a:t>VM 非開機時間部署完要手動關機（否則下次排程不會自動開機）</a:t>
                       </a:r>
-                      <a:r>
-                        <a:rPr lang="zh-TW" altLang="en-US" sz="1700" b="0" cap="none" spc="0" dirty="0">
-                          <a:solidFill>
-                            <a:schemeClr val="tx1"/>
-                          </a:solidFill>
-                        </a:rPr>
-                        <a:t>非開機時間</a:t>
-                      </a:r>
-                      <a:r>
-                        <a:rPr lang="en-US" altLang="zh-TW" sz="1700" b="0" cap="none" spc="0" dirty="0">
-                          <a:solidFill>
-                            <a:schemeClr val="tx1"/>
-                          </a:solidFill>
-                        </a:rPr>
-                        <a:t>,</a:t>
-                      </a:r>
-                      <a:r>
-                        <a:rPr lang="zh-TW" altLang="en-US" sz="1700" b="0" cap="none" spc="0" dirty="0">
-                          <a:solidFill>
-                            <a:schemeClr val="tx1"/>
-                          </a:solidFill>
-                        </a:rPr>
-                        <a:t>上傳完要手動關機</a:t>
-                      </a:r>
-                      <a:r>
-                        <a:rPr lang="en-US" altLang="zh-TW" sz="1700" b="0" cap="none" spc="0" dirty="0">
-                          <a:solidFill>
-                            <a:schemeClr val="tx1"/>
-                          </a:solidFill>
-                        </a:rPr>
-                        <a:t>(</a:t>
-                      </a:r>
-                      <a:r>
-                        <a:rPr lang="zh-TW" altLang="en-US" sz="1700" b="0" cap="none" spc="0" dirty="0">
-                          <a:solidFill>
-                            <a:schemeClr val="tx1"/>
-                          </a:solidFill>
-                        </a:rPr>
-                        <a:t>否則下一個開機時間不會自行開機</a:t>
-                      </a:r>
-                      <a:r>
-                        <a:rPr lang="en-US" altLang="zh-TW" sz="1700" b="0" cap="none" spc="0" dirty="0">
-                          <a:solidFill>
-                            <a:schemeClr val="tx1"/>
-                          </a:solidFill>
-                        </a:rPr>
-                        <a:t>,</a:t>
-                      </a:r>
-                      <a:r>
-                        <a:rPr lang="zh-TW" altLang="en-US" sz="1700" b="0" cap="none" spc="0" dirty="0">
-                          <a:solidFill>
-                            <a:schemeClr val="tx1"/>
-                          </a:solidFill>
-                        </a:rPr>
-                        <a:t>因為一開機時間程式仍休眠</a:t>
-                      </a:r>
-                      <a:r>
-                        <a:rPr lang="en-US" altLang="zh-TW" sz="1700" b="0" cap="none" spc="0" dirty="0">
-                          <a:solidFill>
-                            <a:schemeClr val="tx1"/>
-                          </a:solidFill>
-                        </a:rPr>
-                        <a:t>)</a:t>
-                      </a:r>
-                      <a:endParaRPr lang="zh-TW" sz="1700" b="0" cap="none" spc="0" dirty="0">
-                        <a:solidFill>
-                          <a:schemeClr val="tx1"/>
-                        </a:solidFill>
-                      </a:endParaRPr>
                     </a:p>
                   </a:txBody>
                   <a:tcPr marL="113888" marR="113888" marT="113888" marB="113888" anchor="ctr">
